--- a/projects/goldman-sachs-research/Goldman-Sachs-就活企業研究.pptx
+++ b/projects/goldman-sachs-research/Goldman-Sachs-就活企業研究.pptx
@@ -503,7 +503,7 @@
           </c:spPr>
           <c:invertIfNegative val="0"/>
           <c:dLbls>
-            <c:numFmt formatCode="#,##0" sourceLinked="0"/>
+            <c:numFmt formatCode="0.00" sourceLinked="0"/>
             <c:txPr>
               <a:bodyPr/>
               <a:lstStyle/>
@@ -565,7 +565,7 @@
           </c:val>
         </c:ser>
         <c:dLbls>
-          <c:numFmt formatCode="#,##0" sourceLinked="0"/>
+          <c:numFmt formatCode="0.00" sourceLinked="0"/>
           <c:txPr>
             <a:bodyPr/>
             <a:lstStyle/>
@@ -962,7 +962,7 @@
           </c:spPr>
           <c:invertIfNegative val="0"/>
           <c:dLbls>
-            <c:numFmt formatCode="#,##0" sourceLinked="0"/>
+            <c:numFmt formatCode="0.0&quot;兆&quot;" sourceLinked="0"/>
             <c:txPr>
               <a:bodyPr/>
               <a:lstStyle/>
@@ -1030,7 +1030,7 @@
           </c:val>
         </c:ser>
         <c:dLbls>
-          <c:numFmt formatCode="#,##0" sourceLinked="0"/>
+          <c:numFmt formatCode="0.0&quot;兆&quot;" sourceLinked="0"/>
           <c:txPr>
             <a:bodyPr/>
             <a:lstStyle/>
@@ -1200,7 +1200,7 @@
           </c:spPr>
           <c:invertIfNegative val="0"/>
           <c:dLbls>
-            <c:numFmt formatCode="#,##0" sourceLinked="0"/>
+            <c:numFmt formatCode="$0.0&quot;B&quot;" sourceLinked="0"/>
             <c:txPr>
               <a:bodyPr/>
               <a:lstStyle/>
@@ -1256,7 +1256,7 @@
           </c:val>
         </c:ser>
         <c:dLbls>
-          <c:numFmt formatCode="#,##0" sourceLinked="0"/>
+          <c:numFmt formatCode="$0.0&quot;B&quot;" sourceLinked="0"/>
           <c:txPr>
             <a:bodyPr/>
             <a:lstStyle/>
@@ -1963,7 +1963,7 @@
           <a:p>
             <a:r>
               <a:rPr lang="en-US" dirty="0"/>
-              <a:t>業界ポジション。M&amp;A助言で21年連続世界No.1、2024年シェア約32%。近年は2022好調→2023減速→2024V字。</a:t>
+              <a:t>業界ポジション。M&amp;A助言で世界No.1（2023時点で7年連続）。完了M&amp;A取扱額は直近で約$1.48兆・シェア約32%（2025集計）。近年は2022好調→2023減速→2024V字。</a:t>
             </a:r>
             <a:endParaRPr lang="en-US" dirty="0"/>
           </a:p>
@@ -5112,7 +5112,7 @@
                 <a:ea typeface="Georgia" pitchFamily="34" charset="-122"/>
                 <a:cs typeface="Georgia" pitchFamily="34" charset="-120"/>
               </a:rPr>
-              <a:t>21年連続</a:t>
+              <a:t>7年連続</a:t>
             </a:r>
             <a:endParaRPr lang="en-US" sz="7000" dirty="0"/>
           </a:p>
@@ -5190,7 +5190,7 @@
                 <a:ea typeface="Calibri" pitchFamily="34" charset="-122"/>
                 <a:cs typeface="Calibri" pitchFamily="34" charset="-120"/>
               </a:rPr>
-              <a:t>助言ビジネスで圧倒的なトップポジションを維持。</a:t>
+              <a:t>（2023年時点）助言ビジネスで世界トップを維持。</a:t>
             </a:r>
             <a:endParaRPr lang="en-US" sz="1350" dirty="0"/>
           </a:p>
@@ -5320,7 +5320,7 @@
                 <a:ea typeface="Calibri" pitchFamily="34" charset="-122"/>
                 <a:cs typeface="Calibri" pitchFamily="34" charset="-120"/>
               </a:rPr>
-              <a:t>2024 グローバルM&amp;A 取扱額（首位）</a:t>
+              <a:t>完了M&amp;A 取扱額（世界首位級・直近2025集計）</a:t>
             </a:r>
             <a:endParaRPr lang="en-US" sz="1300" dirty="0"/>
           </a:p>
@@ -12820,7 +12820,7 @@
                 <a:ea typeface="Georgia" pitchFamily="34" charset="-122"/>
                 <a:cs typeface="Georgia" pitchFamily="34" charset="-120"/>
               </a:rPr>
-              <a:t>約 $1.76B</a:t>
+              <a:t>約 $2.43B</a:t>
             </a:r>
             <a:endParaRPr lang="en-US" sz="3400" dirty="0"/>
           </a:p>
@@ -14539,8 +14539,8 @@
         </p:nvSpPr>
         <p:spPr>
           <a:xfrm>
-            <a:off x="6355080" y="1993392"/>
-            <a:ext cx="5029200" cy="365760"/>
+            <a:off x="6355080" y="1975104"/>
+            <a:ext cx="5029200" cy="320040"/>
           </a:xfrm>
           <a:prstGeom prst="rect">
             <a:avLst/>
@@ -14578,8 +14578,8 @@
         </p:nvSpPr>
         <p:spPr>
           <a:xfrm>
-            <a:off x="6355080" y="2331720"/>
-            <a:ext cx="5029200" cy="914400"/>
+            <a:off x="6355080" y="2286000"/>
+            <a:ext cx="5120640" cy="310896"/>
           </a:xfrm>
           <a:prstGeom prst="rect">
             <a:avLst/>
@@ -14595,7 +14595,46 @@
               <a:buNone/>
             </a:pPr>
             <a:r>
-              <a:rPr lang="en-US" sz="1600" dirty="0">
+              <a:rPr lang="en-US" sz="1300" dirty="0">
+                <a:solidFill>
+                  <a:srgbClr val="AEBAD0"/>
+                </a:solidFill>
+                <a:latin typeface="Calibri" pitchFamily="34" charset="0"/>
+                <a:ea typeface="Calibri" pitchFamily="34" charset="-122"/>
+                <a:cs typeface="Calibri" pitchFamily="34" charset="-120"/>
+              </a:rPr>
+              <a:t>Management &amp; other fees（2024）</a:t>
+            </a:r>
+            <a:endParaRPr lang="en-US" sz="1300" dirty="0"/>
+          </a:p>
+        </p:txBody>
+      </p:sp>
+      <p:sp>
+        <p:nvSpPr>
+          <p:cNvPr id="13" name="Text 10"/>
+          <p:cNvSpPr/>
+          <p:nvPr/>
+        </p:nvSpPr>
+        <p:spPr>
+          <a:xfrm>
+            <a:off x="6327648" y="2578608"/>
+            <a:ext cx="5120640" cy="777240"/>
+          </a:xfrm>
+          <a:prstGeom prst="rect">
+            <a:avLst/>
+          </a:prstGeom>
+          <a:noFill/>
+          <a:ln/>
+        </p:spPr>
+        <p:txBody>
+          <a:bodyPr wrap="square" lIns="0" tIns="0" rIns="0" bIns="0" rtlCol="0" anchor="ctr"/>
+          <a:lstStyle/>
+          <a:p>
+            <a:pPr indent="0" marL="0">
+              <a:buNone/>
+            </a:pPr>
+            <a:r>
+              <a:rPr lang="en-US" sz="5000" b="1" dirty="0">
                 <a:solidFill>
                   <a:srgbClr val="FFFFFF"/>
                 </a:solidFill>
@@ -14603,98 +14642,84 @@
                 <a:ea typeface="Georgia" pitchFamily="34" charset="-122"/>
                 <a:cs typeface="Georgia" pitchFamily="34" charset="-120"/>
               </a:rPr>
-              <a:t>Management &amp; other fees </a:t>
-            </a:r>
+              <a:t>$10B超</a:t>
+            </a:r>
+            <a:endParaRPr lang="en-US" sz="5000" dirty="0"/>
+          </a:p>
+        </p:txBody>
+      </p:sp>
+      <p:sp>
+        <p:nvSpPr>
+          <p:cNvPr id="14" name="Text 11"/>
+          <p:cNvSpPr/>
+          <p:nvPr/>
+        </p:nvSpPr>
+        <p:spPr>
+          <a:xfrm>
+            <a:off x="6355080" y="3310128"/>
+            <a:ext cx="5029200" cy="274320"/>
+          </a:xfrm>
+          <a:prstGeom prst="rect">
+            <a:avLst/>
+          </a:prstGeom>
+          <a:noFill/>
+          <a:ln/>
+        </p:spPr>
+        <p:txBody>
+          <a:bodyPr wrap="square" lIns="0" tIns="0" rIns="0" bIns="0" rtlCol="0" anchor="ctr"/>
+          <a:lstStyle/>
+          <a:p>
             <a:pPr indent="0" marL="0">
               <a:buNone/>
             </a:pPr>
             <a:r>
-              <a:rPr lang="en-US" sz="4600" b="1" dirty="0">
-                <a:solidFill>
-                  <a:srgbClr val="FFFFFF"/>
+              <a:rPr lang="en-US" sz="1200" dirty="0">
+                <a:solidFill>
+                  <a:srgbClr val="8E9CB8"/>
+                </a:solidFill>
+                <a:latin typeface="Calibri" pitchFamily="34" charset="0"/>
+                <a:ea typeface="Calibri" pitchFamily="34" charset="-122"/>
+                <a:cs typeface="Calibri" pitchFamily="34" charset="-120"/>
+              </a:rPr>
+              <a:t>安定的なフィー収益が収益の柱に</a:t>
+            </a:r>
+            <a:endParaRPr lang="en-US" sz="1200" dirty="0"/>
+          </a:p>
+        </p:txBody>
+      </p:sp>
+      <p:sp>
+        <p:nvSpPr>
+          <p:cNvPr id="15" name="Text 12"/>
+          <p:cNvSpPr/>
+          <p:nvPr/>
+        </p:nvSpPr>
+        <p:spPr>
+          <a:xfrm>
+            <a:off x="548640" y="3840480"/>
+            <a:ext cx="5486400" cy="320040"/>
+          </a:xfrm>
+          <a:prstGeom prst="rect">
+            <a:avLst/>
+          </a:prstGeom>
+          <a:noFill/>
+          <a:ln/>
+        </p:spPr>
+        <p:txBody>
+          <a:bodyPr wrap="square" lIns="0" tIns="0" rIns="0" bIns="0" rtlCol="0" anchor="ctr"/>
+          <a:lstStyle/>
+          <a:p>
+            <a:pPr indent="0" marL="0">
+              <a:buNone/>
+            </a:pPr>
+            <a:r>
+              <a:rPr lang="en-US" sz="1600" b="1" dirty="0">
+                <a:solidFill>
+                  <a:srgbClr val="0A1A3F"/>
                 </a:solidFill>
                 <a:latin typeface="Georgia" pitchFamily="34" charset="0"/>
                 <a:ea typeface="Georgia" pitchFamily="34" charset="-122"/>
                 <a:cs typeface="Georgia" pitchFamily="34" charset="-120"/>
               </a:rPr>
-              <a:t>$10B超</a:t>
-            </a:r>
-            <a:endParaRPr lang="en-US" sz="1600" dirty="0"/>
-          </a:p>
-        </p:txBody>
-      </p:sp>
-      <p:sp>
-        <p:nvSpPr>
-          <p:cNvPr id="13" name="Text 10"/>
-          <p:cNvSpPr/>
-          <p:nvPr/>
-        </p:nvSpPr>
-        <p:spPr>
-          <a:xfrm>
-            <a:off x="6355080" y="3200400"/>
-            <a:ext cx="5029200" cy="320040"/>
-          </a:xfrm>
-          <a:prstGeom prst="rect">
-            <a:avLst/>
-          </a:prstGeom>
-          <a:noFill/>
-          <a:ln/>
-        </p:spPr>
-        <p:txBody>
-          <a:bodyPr wrap="square" lIns="0" tIns="0" rIns="0" bIns="0" rtlCol="0" anchor="ctr"/>
-          <a:lstStyle/>
-          <a:p>
-            <a:pPr indent="0" marL="0">
-              <a:buNone/>
-            </a:pPr>
-            <a:r>
-              <a:rPr lang="en-US" sz="1250" dirty="0">
-                <a:solidFill>
-                  <a:srgbClr val="AEBAD0"/>
-                </a:solidFill>
-                <a:latin typeface="Calibri" pitchFamily="34" charset="0"/>
-                <a:ea typeface="Calibri" pitchFamily="34" charset="-122"/>
-                <a:cs typeface="Calibri" pitchFamily="34" charset="-120"/>
-              </a:rPr>
-              <a:t>（2024年）安定的なフィー収益が収益の柱に</a:t>
-            </a:r>
-            <a:endParaRPr lang="en-US" sz="1250" dirty="0"/>
-          </a:p>
-        </p:txBody>
-      </p:sp>
-      <p:sp>
-        <p:nvSpPr>
-          <p:cNvPr id="14" name="Text 11"/>
-          <p:cNvSpPr/>
-          <p:nvPr/>
-        </p:nvSpPr>
-        <p:spPr>
-          <a:xfrm>
-            <a:off x="548640" y="3840480"/>
-            <a:ext cx="5486400" cy="320040"/>
-          </a:xfrm>
-          <a:prstGeom prst="rect">
-            <a:avLst/>
-          </a:prstGeom>
-          <a:noFill/>
-          <a:ln/>
-        </p:spPr>
-        <p:txBody>
-          <a:bodyPr wrap="square" lIns="0" tIns="0" rIns="0" bIns="0" rtlCol="0" anchor="ctr"/>
-          <a:lstStyle/>
-          <a:p>
-            <a:pPr indent="0" marL="0">
-              <a:buNone/>
-            </a:pPr>
-            <a:r>
-              <a:rPr lang="en-US" sz="1600" b="1" dirty="0">
-                <a:solidFill>
-                  <a:srgbClr val="0A1A3F"/>
-                </a:solidFill>
-                <a:latin typeface="Georgia" pitchFamily="34" charset="0"/>
-                <a:ea typeface="Georgia" pitchFamily="34" charset="-122"/>
-                <a:cs typeface="Georgia" pitchFamily="34" charset="-120"/>
-              </a:rPr>
               <a:t>結果：税前マージンが激変</a:t>
             </a:r>
             <a:endParaRPr lang="en-US" sz="1600" dirty="0"/>
@@ -14703,7 +14728,7 @@
       </p:sp>
       <p:graphicFrame>
         <p:nvGraphicFramePr>
-          <p:cNvPr id="15" name="Chart 0" descr=""/>
+          <p:cNvPr id="16" name="Chart 0" descr=""/>
           <p:cNvGraphicFramePr/>
           <p:nvPr/>
         </p:nvGraphicFramePr>
@@ -14719,7 +14744,7 @@
       </p:graphicFrame>
       <p:sp>
         <p:nvSpPr>
-          <p:cNvPr id="16" name="Shape 12"/>
+          <p:cNvPr id="17" name="Shape 13"/>
           <p:cNvSpPr/>
           <p:nvPr/>
         </p:nvSpPr>
@@ -14751,7 +14776,7 @@
       </p:sp>
       <p:sp>
         <p:nvSpPr>
-          <p:cNvPr id="17" name="Shape 13"/>
+          <p:cNvPr id="18" name="Shape 14"/>
           <p:cNvSpPr/>
           <p:nvPr/>
         </p:nvSpPr>
@@ -14771,7 +14796,7 @@
       </p:sp>
       <p:sp>
         <p:nvSpPr>
-          <p:cNvPr id="18" name="Text 14"/>
+          <p:cNvPr id="19" name="Text 15"/>
           <p:cNvSpPr/>
           <p:nvPr/>
         </p:nvSpPr>
@@ -14810,7 +14835,7 @@
       </p:sp>
       <p:sp>
         <p:nvSpPr>
-          <p:cNvPr id="19" name="Text 15"/>
+          <p:cNvPr id="20" name="Text 16"/>
           <p:cNvSpPr/>
           <p:nvPr/>
         </p:nvSpPr>
@@ -14849,7 +14874,7 @@
       </p:sp>
       <p:sp>
         <p:nvSpPr>
-          <p:cNvPr id="20" name="Shape 16"/>
+          <p:cNvPr id="21" name="Shape 17"/>
           <p:cNvSpPr/>
           <p:nvPr/>
         </p:nvSpPr>
@@ -14874,7 +14899,7 @@
       </p:sp>
       <p:sp>
         <p:nvSpPr>
-          <p:cNvPr id="21" name="Text 17"/>
+          <p:cNvPr id="22" name="Text 18"/>
           <p:cNvSpPr/>
           <p:nvPr/>
         </p:nvSpPr>
@@ -14913,7 +14938,7 @@
       </p:sp>
       <p:sp>
         <p:nvSpPr>
-          <p:cNvPr id="22" name="Text 18"/>
+          <p:cNvPr id="23" name="Text 19"/>
           <p:cNvSpPr/>
           <p:nvPr/>
         </p:nvSpPr>
@@ -14952,7 +14977,7 @@
       </p:sp>
       <p:sp>
         <p:nvSpPr>
-          <p:cNvPr id="23" name="Text 19"/>
+          <p:cNvPr id="24" name="Text 20"/>
           <p:cNvSpPr/>
           <p:nvPr/>
         </p:nvSpPr>

--- a/projects/goldman-sachs-research/Goldman-Sachs-就活企業研究.pptx
+++ b/projects/goldman-sachs-research/Goldman-Sachs-就活企業研究.pptx
@@ -166,7 +166,7 @@
                     <a:solidFill>
                       <a:srgbClr val="0A1A3F"/>
                     </a:solidFill>
-                    <a:latin typeface="Calibri"/>
+                    <a:latin typeface="Noto Sans CJK JP"/>
                   </a:defRPr>
                 </a:pPr>
               </a:p>
@@ -249,7 +249,7 @@
                     <a:solidFill>
                       <a:srgbClr val="0A1A3F"/>
                     </a:solidFill>
-                    <a:latin typeface="Calibri"/>
+                    <a:latin typeface="Noto Sans CJK JP"/>
                   </a:defRPr>
                 </a:pPr>
               </a:p>
@@ -311,7 +311,7 @@
                   <a:solidFill>
                     <a:srgbClr val="0A1A3F"/>
                   </a:solidFill>
-                  <a:latin typeface="Calibri"/>
+                  <a:latin typeface="Noto Sans CJK JP"/>
                 </a:defRPr>
               </a:pPr>
             </a:p>
@@ -359,7 +359,7 @@
                 <a:solidFill>
                   <a:srgbClr val="1B2436"/>
                 </a:solidFill>
-                <a:latin typeface="Calibri"/>
+                <a:latin typeface="Noto Sans CJK JP"/>
               </a:defRPr>
             </a:pPr>
             <a:endParaRPr lang="en-US"/>
@@ -443,8 +443,8 @@
               <a:solidFill>
                 <a:srgbClr val="1B2436"/>
               </a:solidFill>
-              <a:latin typeface="Calibri"/>
-              <a:cs typeface="Calibri"/>
+              <a:latin typeface="Noto Sans CJK JP"/>
+              <a:cs typeface="Noto Sans CJK JP"/>
             </a:defRPr>
           </a:pPr>
           <a:endParaRPr lang="en-US"/>
@@ -513,7 +513,7 @@
                     <a:solidFill>
                       <a:srgbClr val="0A1A3F"/>
                     </a:solidFill>
-                    <a:latin typeface="Georgia"/>
+                    <a:latin typeface="Noto Sans CJK JP"/>
                   </a:defRPr>
                 </a:pPr>
               </a:p>
@@ -575,7 +575,7 @@
                   <a:solidFill>
                     <a:srgbClr val="0A1A3F"/>
                   </a:solidFill>
-                  <a:latin typeface="Georgia"/>
+                  <a:latin typeface="Noto Sans CJK JP"/>
                 </a:defRPr>
               </a:pPr>
             </a:p>
@@ -623,7 +623,7 @@
                 <a:solidFill>
                   <a:srgbClr val="1B2436"/>
                 </a:solidFill>
-                <a:latin typeface="Calibri"/>
+                <a:latin typeface="Noto Sans CJK JP"/>
               </a:defRPr>
             </a:pPr>
             <a:endParaRPr lang="en-US"/>
@@ -746,7 +746,7 @@
                     <a:solidFill>
                       <a:srgbClr val="0A1A3F"/>
                     </a:solidFill>
-                    <a:latin typeface="Georgia"/>
+                    <a:latin typeface="Noto Sans CJK JP"/>
                   </a:defRPr>
                 </a:pPr>
               </a:p>
@@ -802,7 +802,7 @@
                   <a:solidFill>
                     <a:srgbClr val="0A1A3F"/>
                   </a:solidFill>
-                  <a:latin typeface="Georgia"/>
+                  <a:latin typeface="Noto Sans CJK JP"/>
                 </a:defRPr>
               </a:pPr>
             </a:p>
@@ -850,7 +850,7 @@
                 <a:solidFill>
                   <a:srgbClr val="1B2436"/>
                 </a:solidFill>
-                <a:latin typeface="Calibri"/>
+                <a:latin typeface="Noto Sans CJK JP"/>
               </a:defRPr>
             </a:pPr>
             <a:endParaRPr lang="en-US"/>
@@ -972,7 +972,7 @@
                     <a:solidFill>
                       <a:srgbClr val="0A1A3F"/>
                     </a:solidFill>
-                    <a:latin typeface="Georgia"/>
+                    <a:latin typeface="Noto Sans CJK JP"/>
                   </a:defRPr>
                 </a:pPr>
               </a:p>
@@ -1040,7 +1040,7 @@
                   <a:solidFill>
                     <a:srgbClr val="0A1A3F"/>
                   </a:solidFill>
-                  <a:latin typeface="Georgia"/>
+                  <a:latin typeface="Noto Sans CJK JP"/>
                 </a:defRPr>
               </a:pPr>
             </a:p>
@@ -1088,7 +1088,7 @@
                 <a:solidFill>
                   <a:srgbClr val="1B2436"/>
                 </a:solidFill>
-                <a:latin typeface="Calibri"/>
+                <a:latin typeface="Noto Sans CJK JP"/>
               </a:defRPr>
             </a:pPr>
             <a:endParaRPr lang="en-US"/>
@@ -1210,7 +1210,7 @@
                     <a:solidFill>
                       <a:srgbClr val="0A1A3F"/>
                     </a:solidFill>
-                    <a:latin typeface="Georgia"/>
+                    <a:latin typeface="Noto Sans CJK JP"/>
                   </a:defRPr>
                 </a:pPr>
               </a:p>
@@ -1266,7 +1266,7 @@
                   <a:solidFill>
                     <a:srgbClr val="0A1A3F"/>
                   </a:solidFill>
-                  <a:latin typeface="Georgia"/>
+                  <a:latin typeface="Noto Sans CJK JP"/>
                 </a:defRPr>
               </a:pPr>
             </a:p>
@@ -1314,7 +1314,7 @@
                 <a:solidFill>
                   <a:srgbClr val="1B2436"/>
                 </a:solidFill>
-                <a:latin typeface="Calibri"/>
+                <a:latin typeface="Noto Sans CJK JP"/>
               </a:defRPr>
             </a:pPr>
             <a:endParaRPr lang="en-US"/>
@@ -3732,9 +3732,9 @@
                 <a:solidFill>
                   <a:srgbClr val="C9A227"/>
                 </a:solidFill>
-                <a:latin typeface="Georgia" pitchFamily="34" charset="0"/>
-                <a:ea typeface="Georgia" pitchFamily="34" charset="-122"/>
-                <a:cs typeface="Georgia" pitchFamily="34" charset="-120"/>
+                <a:latin typeface="Noto Sans CJK JP" pitchFamily="34" charset="0"/>
+                <a:ea typeface="Noto Sans CJK JP" pitchFamily="34" charset="-122"/>
+                <a:cs typeface="Noto Sans CJK JP" pitchFamily="34" charset="-120"/>
               </a:rPr>
               <a:t>GS</a:t>
             </a:r>
@@ -3791,9 +3791,9 @@
                 <a:solidFill>
                   <a:srgbClr val="FFFFFF"/>
                 </a:solidFill>
-                <a:latin typeface="Georgia" pitchFamily="34" charset="0"/>
-                <a:ea typeface="Georgia" pitchFamily="34" charset="-122"/>
-                <a:cs typeface="Georgia" pitchFamily="34" charset="-120"/>
+                <a:latin typeface="Noto Sans CJK JP" pitchFamily="34" charset="0"/>
+                <a:ea typeface="Noto Sans CJK JP" pitchFamily="34" charset="-122"/>
+                <a:cs typeface="Noto Sans CJK JP" pitchFamily="34" charset="-120"/>
               </a:rPr>
               <a:t>企業研究</a:t>
             </a:r>
@@ -3830,9 +3830,9 @@
                 <a:solidFill>
                   <a:srgbClr val="FFFFFF"/>
                 </a:solidFill>
-                <a:latin typeface="Georgia" pitchFamily="34" charset="0"/>
-                <a:ea typeface="Georgia" pitchFamily="34" charset="-122"/>
-                <a:cs typeface="Georgia" pitchFamily="34" charset="-120"/>
+                <a:latin typeface="Noto Sans CJK JP" pitchFamily="34" charset="0"/>
+                <a:ea typeface="Noto Sans CJK JP" pitchFamily="34" charset="-122"/>
+                <a:cs typeface="Noto Sans CJK JP" pitchFamily="34" charset="-120"/>
               </a:rPr>
               <a:t>Goldman Sachs 企業研究</a:t>
             </a:r>
@@ -3869,9 +3869,9 @@
                 <a:solidFill>
                   <a:srgbClr val="E8B84B"/>
                 </a:solidFill>
-                <a:latin typeface="Calibri" pitchFamily="34" charset="0"/>
-                <a:ea typeface="Calibri" pitchFamily="34" charset="-122"/>
-                <a:cs typeface="Calibri" pitchFamily="34" charset="-120"/>
+                <a:latin typeface="Noto Sans CJK JP" pitchFamily="34" charset="0"/>
+                <a:ea typeface="Noto Sans CJK JP" pitchFamily="34" charset="-122"/>
+                <a:cs typeface="Noto Sans CJK JP" pitchFamily="34" charset="-120"/>
               </a:rPr>
               <a:t>アセット・マネジメント部門 × 営業部門 を読み解く</a:t>
             </a:r>
@@ -3928,9 +3928,9 @@
                 <a:solidFill>
                   <a:srgbClr val="AEBAD0"/>
                 </a:solidFill>
-                <a:latin typeface="Calibri" pitchFamily="34" charset="0"/>
-                <a:ea typeface="Calibri" pitchFamily="34" charset="-122"/>
-                <a:cs typeface="Calibri" pitchFamily="34" charset="-120"/>
+                <a:latin typeface="Noto Sans CJK JP" pitchFamily="34" charset="0"/>
+                <a:ea typeface="Noto Sans CJK JP" pitchFamily="34" charset="-122"/>
+                <a:cs typeface="Noto Sans CJK JP" pitchFamily="34" charset="-120"/>
               </a:rPr>
               <a:t>就活企業研究  /  2025年版（FY2024決算ベース）</a:t>
             </a:r>
@@ -3999,9 +3999,9 @@
                 <a:solidFill>
                   <a:srgbClr val="C9A227"/>
                 </a:solidFill>
-                <a:latin typeface="Calibri" pitchFamily="34" charset="0"/>
-                <a:ea typeface="Calibri" pitchFamily="34" charset="-122"/>
-                <a:cs typeface="Calibri" pitchFamily="34" charset="-120"/>
+                <a:latin typeface="Noto Sans CJK JP" pitchFamily="34" charset="0"/>
+                <a:ea typeface="Noto Sans CJK JP" pitchFamily="34" charset="-122"/>
+                <a:cs typeface="Noto Sans CJK JP" pitchFamily="34" charset="-120"/>
               </a:rPr>
               <a:t>DIVISION 2 — STRUCTURE</a:t>
             </a:r>
@@ -4038,9 +4038,9 @@
                 <a:solidFill>
                   <a:srgbClr val="0A1A3F"/>
                 </a:solidFill>
-                <a:latin typeface="Georgia" pitchFamily="34" charset="0"/>
-                <a:ea typeface="Georgia" pitchFamily="34" charset="-122"/>
-                <a:cs typeface="Georgia" pitchFamily="34" charset="-120"/>
+                <a:latin typeface="Noto Sans CJK JP" pitchFamily="34" charset="0"/>
+                <a:ea typeface="Noto Sans CJK JP" pitchFamily="34" charset="-122"/>
+                <a:cs typeface="Noto Sans CJK JP" pitchFamily="34" charset="-120"/>
               </a:rPr>
               <a:t>営業の収益は「2階建て」</a:t>
             </a:r>
@@ -4144,9 +4144,9 @@
                 <a:solidFill>
                   <a:srgbClr val="0A1A3F"/>
                 </a:solidFill>
-                <a:latin typeface="Georgia" pitchFamily="34" charset="0"/>
-                <a:ea typeface="Georgia" pitchFamily="34" charset="-122"/>
-                <a:cs typeface="Georgia" pitchFamily="34" charset="-120"/>
+                <a:latin typeface="Noto Sans CJK JP" pitchFamily="34" charset="0"/>
+                <a:ea typeface="Noto Sans CJK JP" pitchFamily="34" charset="-122"/>
+                <a:cs typeface="Noto Sans CJK JP" pitchFamily="34" charset="-120"/>
               </a:rPr>
               <a:t>2階</a:t>
             </a:r>
@@ -4183,9 +4183,9 @@
                 <a:solidFill>
                   <a:srgbClr val="FFFFFF"/>
                 </a:solidFill>
-                <a:latin typeface="Georgia" pitchFamily="34" charset="0"/>
-                <a:ea typeface="Georgia" pitchFamily="34" charset="-122"/>
-                <a:cs typeface="Georgia" pitchFamily="34" charset="-120"/>
+                <a:latin typeface="Noto Sans CJK JP" pitchFamily="34" charset="0"/>
+                <a:ea typeface="Noto Sans CJK JP" pitchFamily="34" charset="-122"/>
+                <a:cs typeface="Noto Sans CJK JP" pitchFamily="34" charset="-120"/>
               </a:rPr>
               <a:t>ファイナンシング</a:t>
             </a:r>
@@ -4222,9 +4222,9 @@
                 <a:solidFill>
                   <a:srgbClr val="CBD5E8"/>
                 </a:solidFill>
-                <a:latin typeface="Calibri" pitchFamily="34" charset="0"/>
-                <a:ea typeface="Calibri" pitchFamily="34" charset="-122"/>
-                <a:cs typeface="Calibri" pitchFamily="34" charset="-120"/>
+                <a:latin typeface="Noto Sans CJK JP" pitchFamily="34" charset="0"/>
+                <a:ea typeface="Noto Sans CJK JP" pitchFamily="34" charset="-122"/>
+                <a:cs typeface="Noto Sans CJK JP" pitchFamily="34" charset="-120"/>
               </a:rPr>
               <a:t>プライム・ブローカレッジ／レポ／担保貸付など</a:t>
             </a:r>
@@ -4283,9 +4283,9 @@
                 <a:solidFill>
                   <a:srgbClr val="0A1A3F"/>
                 </a:solidFill>
-                <a:latin typeface="Calibri" pitchFamily="34" charset="0"/>
-                <a:ea typeface="Calibri" pitchFamily="34" charset="-122"/>
-                <a:cs typeface="Calibri" pitchFamily="34" charset="-120"/>
+                <a:latin typeface="Noto Sans CJK JP" pitchFamily="34" charset="0"/>
+                <a:ea typeface="Noto Sans CJK JP" pitchFamily="34" charset="-122"/>
+                <a:cs typeface="Noto Sans CJK JP" pitchFamily="34" charset="-120"/>
               </a:rPr>
               <a:t>反復的・安定収益</a:t>
             </a:r>
@@ -4369,9 +4369,9 @@
                 <a:solidFill>
                   <a:srgbClr val="FFFFFF"/>
                 </a:solidFill>
-                <a:latin typeface="Georgia" pitchFamily="34" charset="0"/>
-                <a:ea typeface="Georgia" pitchFamily="34" charset="-122"/>
-                <a:cs typeface="Georgia" pitchFamily="34" charset="-120"/>
+                <a:latin typeface="Noto Sans CJK JP" pitchFamily="34" charset="0"/>
+                <a:ea typeface="Noto Sans CJK JP" pitchFamily="34" charset="-122"/>
+                <a:cs typeface="Noto Sans CJK JP" pitchFamily="34" charset="-120"/>
               </a:rPr>
               <a:t>1階</a:t>
             </a:r>
@@ -4408,9 +4408,9 @@
                 <a:solidFill>
                   <a:srgbClr val="FFFFFF"/>
                 </a:solidFill>
-                <a:latin typeface="Georgia" pitchFamily="34" charset="0"/>
-                <a:ea typeface="Georgia" pitchFamily="34" charset="-122"/>
-                <a:cs typeface="Georgia" pitchFamily="34" charset="-120"/>
+                <a:latin typeface="Noto Sans CJK JP" pitchFamily="34" charset="0"/>
+                <a:ea typeface="Noto Sans CJK JP" pitchFamily="34" charset="-122"/>
+                <a:cs typeface="Noto Sans CJK JP" pitchFamily="34" charset="-120"/>
               </a:rPr>
               <a:t>マーケットメイク（仲介）</a:t>
             </a:r>
@@ -4447,9 +4447,9 @@
                 <a:solidFill>
                   <a:srgbClr val="DDE3EF"/>
                 </a:solidFill>
-                <a:latin typeface="Calibri" pitchFamily="34" charset="0"/>
-                <a:ea typeface="Calibri" pitchFamily="34" charset="-122"/>
-                <a:cs typeface="Calibri" pitchFamily="34" charset="-120"/>
+                <a:latin typeface="Noto Sans CJK JP" pitchFamily="34" charset="0"/>
+                <a:ea typeface="Noto Sans CJK JP" pitchFamily="34" charset="-122"/>
+                <a:cs typeface="Noto Sans CJK JP" pitchFamily="34" charset="-120"/>
               </a:rPr>
               <a:t>両建ての値段を提示し流動性を供給、顧客フローを仲介</a:t>
             </a:r>
@@ -4508,9 +4508,9 @@
                 <a:solidFill>
                   <a:srgbClr val="0A1A3F"/>
                 </a:solidFill>
-                <a:latin typeface="Calibri" pitchFamily="34" charset="0"/>
-                <a:ea typeface="Calibri" pitchFamily="34" charset="-122"/>
-                <a:cs typeface="Calibri" pitchFamily="34" charset="-120"/>
+                <a:latin typeface="Noto Sans CJK JP" pitchFamily="34" charset="0"/>
+                <a:ea typeface="Noto Sans CJK JP" pitchFamily="34" charset="-122"/>
+                <a:cs typeface="Noto Sans CJK JP" pitchFamily="34" charset="-120"/>
               </a:rPr>
               <a:t>市況・ボラ次第で変動</a:t>
             </a:r>
@@ -4599,9 +4599,9 @@
                 <a:solidFill>
                   <a:srgbClr val="0A1A3F"/>
                 </a:solidFill>
-                <a:latin typeface="Georgia" pitchFamily="34" charset="0"/>
-                <a:ea typeface="Georgia" pitchFamily="34" charset="-122"/>
-                <a:cs typeface="Georgia" pitchFamily="34" charset="-120"/>
+                <a:latin typeface="Noto Sans CJK JP" pitchFamily="34" charset="0"/>
+                <a:ea typeface="Noto Sans CJK JP" pitchFamily="34" charset="-122"/>
+                <a:cs typeface="Noto Sans CJK JP" pitchFamily="34" charset="-120"/>
               </a:rPr>
               <a:t>$9.1B</a:t>
             </a:r>
@@ -4638,9 +4638,9 @@
                 <a:solidFill>
                   <a:srgbClr val="1B2436"/>
                 </a:solidFill>
-                <a:latin typeface="Calibri" pitchFamily="34" charset="0"/>
-                <a:ea typeface="Calibri" pitchFamily="34" charset="-122"/>
-                <a:cs typeface="Calibri" pitchFamily="34" charset="-120"/>
+                <a:latin typeface="Noto Sans CJK JP" pitchFamily="34" charset="0"/>
+                <a:ea typeface="Noto Sans CJK JP" pitchFamily="34" charset="-122"/>
+                <a:cs typeface="Noto Sans CJK JP" pitchFamily="34" charset="-120"/>
               </a:rPr>
               <a:t>ファイナンシング収益（2024・過去最高）</a:t>
             </a:r>
@@ -4677,9 +4677,9 @@
                 <a:solidFill>
                   <a:srgbClr val="5A6678"/>
                 </a:solidFill>
-                <a:latin typeface="Calibri" pitchFamily="34" charset="0"/>
-                <a:ea typeface="Calibri" pitchFamily="34" charset="-122"/>
-                <a:cs typeface="Calibri" pitchFamily="34" charset="-120"/>
+                <a:latin typeface="Noto Sans CJK JP" pitchFamily="34" charset="0"/>
+                <a:ea typeface="Noto Sans CJK JP" pitchFamily="34" charset="-122"/>
+                <a:cs typeface="Noto Sans CJK JP" pitchFamily="34" charset="-120"/>
               </a:rPr>
               <a:t>2019年比 CAGR 15%</a:t>
             </a:r>
@@ -4716,9 +4716,9 @@
                 <a:solidFill>
                   <a:srgbClr val="0A1A3F"/>
                 </a:solidFill>
-                <a:latin typeface="Georgia" pitchFamily="34" charset="0"/>
-                <a:ea typeface="Georgia" pitchFamily="34" charset="-122"/>
-                <a:cs typeface="Georgia" pitchFamily="34" charset="-120"/>
+                <a:latin typeface="Noto Sans CJK JP" pitchFamily="34" charset="0"/>
+                <a:ea typeface="Noto Sans CJK JP" pitchFamily="34" charset="-122"/>
+                <a:cs typeface="Noto Sans CJK JP" pitchFamily="34" charset="-120"/>
               </a:rPr>
               <a:t>ファイナンシング収益の伸び</a:t>
             </a:r>
@@ -4771,9 +4771,9 @@
                 <a:solidFill>
                   <a:srgbClr val="5A6678"/>
                 </a:solidFill>
-                <a:latin typeface="Calibri" pitchFamily="34" charset="0"/>
-                <a:ea typeface="Calibri" pitchFamily="34" charset="-122"/>
-                <a:cs typeface="Calibri" pitchFamily="34" charset="-120"/>
+                <a:latin typeface="Noto Sans CJK JP" pitchFamily="34" charset="0"/>
+                <a:ea typeface="Noto Sans CJK JP" pitchFamily="34" charset="-122"/>
+                <a:cs typeface="Noto Sans CJK JP" pitchFamily="34" charset="-120"/>
               </a:rPr>
               <a:t>※2019年は概算（CAGR15%からの逆算イメージ）</a:t>
             </a:r>
@@ -4835,9 +4835,9 @@
                 <a:solidFill>
                   <a:srgbClr val="C9A227"/>
                 </a:solidFill>
-                <a:latin typeface="Calibri" pitchFamily="34" charset="0"/>
-                <a:ea typeface="Calibri" pitchFamily="34" charset="-122"/>
-                <a:cs typeface="Calibri" pitchFamily="34" charset="-120"/>
+                <a:latin typeface="Noto Sans CJK JP" pitchFamily="34" charset="0"/>
+                <a:ea typeface="Noto Sans CJK JP" pitchFamily="34" charset="-122"/>
+                <a:cs typeface="Noto Sans CJK JP" pitchFamily="34" charset="-120"/>
               </a:rPr>
               <a:t>メッセージ： </a:t>
             </a:r>
@@ -4849,9 +4849,9 @@
                 <a:solidFill>
                   <a:srgbClr val="0A1A3F"/>
                 </a:solidFill>
-                <a:latin typeface="Calibri" pitchFamily="34" charset="0"/>
-                <a:ea typeface="Calibri" pitchFamily="34" charset="-122"/>
-                <a:cs typeface="Calibri" pitchFamily="34" charset="-120"/>
+                <a:latin typeface="Noto Sans CJK JP" pitchFamily="34" charset="0"/>
+                <a:ea typeface="Noto Sans CJK JP" pitchFamily="34" charset="-122"/>
+                <a:cs typeface="Noto Sans CJK JP" pitchFamily="34" charset="-120"/>
               </a:rPr>
               <a:t>AWMの「運用フィー」と同じく、営業も“安定収益”を厚くしている ＝ 全社で一貫。</a:t>
             </a:r>
@@ -4888,9 +4888,9 @@
                 <a:solidFill>
                   <a:srgbClr val="5A6678"/>
                 </a:solidFill>
-                <a:latin typeface="Calibri" pitchFamily="34" charset="0"/>
-                <a:ea typeface="Calibri" pitchFamily="34" charset="-122"/>
-                <a:cs typeface="Calibri" pitchFamily="34" charset="-120"/>
+                <a:latin typeface="Noto Sans CJK JP" pitchFamily="34" charset="0"/>
+                <a:ea typeface="Noto Sans CJK JP" pitchFamily="34" charset="-122"/>
+                <a:cs typeface="Noto Sans CJK JP" pitchFamily="34" charset="-120"/>
               </a:rPr>
               <a:t>10</a:t>
             </a:r>
@@ -4959,9 +4959,9 @@
                 <a:solidFill>
                   <a:srgbClr val="C9A227"/>
                 </a:solidFill>
-                <a:latin typeface="Calibri" pitchFamily="34" charset="0"/>
-                <a:ea typeface="Calibri" pitchFamily="34" charset="-122"/>
-                <a:cs typeface="Calibri" pitchFamily="34" charset="-120"/>
+                <a:latin typeface="Noto Sans CJK JP" pitchFamily="34" charset="0"/>
+                <a:ea typeface="Noto Sans CJK JP" pitchFamily="34" charset="-122"/>
+                <a:cs typeface="Noto Sans CJK JP" pitchFamily="34" charset="-120"/>
               </a:rPr>
               <a:t>MARKET POSITION</a:t>
             </a:r>
@@ -4998,9 +4998,9 @@
                 <a:solidFill>
                   <a:srgbClr val="0A1A3F"/>
                 </a:solidFill>
-                <a:latin typeface="Georgia" pitchFamily="34" charset="0"/>
-                <a:ea typeface="Georgia" pitchFamily="34" charset="-122"/>
-                <a:cs typeface="Georgia" pitchFamily="34" charset="-120"/>
+                <a:latin typeface="Noto Sans CJK JP" pitchFamily="34" charset="0"/>
+                <a:ea typeface="Noto Sans CJK JP" pitchFamily="34" charset="-122"/>
+                <a:cs typeface="Noto Sans CJK JP" pitchFamily="34" charset="-120"/>
               </a:rPr>
               <a:t>業界での立ち位置：助言の絶対王者</a:t>
             </a:r>
@@ -5108,9 +5108,9 @@
                 <a:solidFill>
                   <a:srgbClr val="E8B84B"/>
                 </a:solidFill>
-                <a:latin typeface="Georgia" pitchFamily="34" charset="0"/>
-                <a:ea typeface="Georgia" pitchFamily="34" charset="-122"/>
-                <a:cs typeface="Georgia" pitchFamily="34" charset="-120"/>
+                <a:latin typeface="Noto Sans CJK JP" pitchFamily="34" charset="0"/>
+                <a:ea typeface="Noto Sans CJK JP" pitchFamily="34" charset="-122"/>
+                <a:cs typeface="Noto Sans CJK JP" pitchFamily="34" charset="-120"/>
               </a:rPr>
               <a:t>7年連続</a:t>
             </a:r>
@@ -5147,9 +5147,9 @@
                 <a:solidFill>
                   <a:srgbClr val="FFFFFF"/>
                 </a:solidFill>
-                <a:latin typeface="Georgia" pitchFamily="34" charset="0"/>
-                <a:ea typeface="Georgia" pitchFamily="34" charset="-122"/>
-                <a:cs typeface="Georgia" pitchFamily="34" charset="-120"/>
+                <a:latin typeface="Noto Sans CJK JP" pitchFamily="34" charset="0"/>
+                <a:ea typeface="Noto Sans CJK JP" pitchFamily="34" charset="-122"/>
+                <a:cs typeface="Noto Sans CJK JP" pitchFamily="34" charset="-120"/>
               </a:rPr>
               <a:t>M&amp;Aアドバイザリー 世界No.1</a:t>
             </a:r>
@@ -5186,9 +5186,9 @@
                 <a:solidFill>
                   <a:srgbClr val="AEBAD0"/>
                 </a:solidFill>
-                <a:latin typeface="Calibri" pitchFamily="34" charset="0"/>
-                <a:ea typeface="Calibri" pitchFamily="34" charset="-122"/>
-                <a:cs typeface="Calibri" pitchFamily="34" charset="-120"/>
+                <a:latin typeface="Noto Sans CJK JP" pitchFamily="34" charset="0"/>
+                <a:ea typeface="Noto Sans CJK JP" pitchFamily="34" charset="-122"/>
+                <a:cs typeface="Noto Sans CJK JP" pitchFamily="34" charset="-120"/>
               </a:rPr>
               <a:t>（2023年時点）助言ビジネスで世界トップを維持。</a:t>
             </a:r>
@@ -5277,9 +5277,9 @@
                 <a:solidFill>
                   <a:srgbClr val="0A1A3F"/>
                 </a:solidFill>
-                <a:latin typeface="Georgia" pitchFamily="34" charset="0"/>
-                <a:ea typeface="Georgia" pitchFamily="34" charset="-122"/>
-                <a:cs typeface="Georgia" pitchFamily="34" charset="-120"/>
+                <a:latin typeface="Noto Sans CJK JP" pitchFamily="34" charset="0"/>
+                <a:ea typeface="Noto Sans CJK JP" pitchFamily="34" charset="-122"/>
+                <a:cs typeface="Noto Sans CJK JP" pitchFamily="34" charset="-120"/>
               </a:rPr>
               <a:t>約$1.48兆 / シェア約32%</a:t>
             </a:r>
@@ -5316,9 +5316,9 @@
                 <a:solidFill>
                   <a:srgbClr val="1B2436"/>
                 </a:solidFill>
-                <a:latin typeface="Calibri" pitchFamily="34" charset="0"/>
-                <a:ea typeface="Calibri" pitchFamily="34" charset="-122"/>
-                <a:cs typeface="Calibri" pitchFamily="34" charset="-120"/>
+                <a:latin typeface="Noto Sans CJK JP" pitchFamily="34" charset="0"/>
+                <a:ea typeface="Noto Sans CJK JP" pitchFamily="34" charset="-122"/>
+                <a:cs typeface="Noto Sans CJK JP" pitchFamily="34" charset="-120"/>
               </a:rPr>
               <a:t>完了M&amp;A 取扱額（世界首位級・直近2025集計）</a:t>
             </a:r>
@@ -5407,9 +5407,9 @@
                 <a:solidFill>
                   <a:srgbClr val="0A1A3F"/>
                 </a:solidFill>
-                <a:latin typeface="Georgia" pitchFamily="34" charset="0"/>
-                <a:ea typeface="Georgia" pitchFamily="34" charset="-122"/>
-                <a:cs typeface="Georgia" pitchFamily="34" charset="-120"/>
+                <a:latin typeface="Noto Sans CJK JP" pitchFamily="34" charset="0"/>
+                <a:ea typeface="Noto Sans CJK JP" pitchFamily="34" charset="-122"/>
+                <a:cs typeface="Noto Sans CJK JP" pitchFamily="34" charset="-120"/>
               </a:rPr>
               <a:t>No.1</a:t>
             </a:r>
@@ -5446,9 +5446,9 @@
                 <a:solidFill>
                   <a:srgbClr val="1B2436"/>
                 </a:solidFill>
-                <a:latin typeface="Calibri" pitchFamily="34" charset="0"/>
-                <a:ea typeface="Calibri" pitchFamily="34" charset="-122"/>
-                <a:cs typeface="Calibri" pitchFamily="34" charset="-120"/>
+                <a:latin typeface="Noto Sans CJK JP" pitchFamily="34" charset="0"/>
+                <a:ea typeface="Noto Sans CJK JP" pitchFamily="34" charset="-122"/>
+                <a:cs typeface="Noto Sans CJK JP" pitchFamily="34" charset="-120"/>
               </a:rPr>
               <a:t>株式引受ボリューム（2023）</a:t>
             </a:r>
@@ -5517,9 +5517,9 @@
                 <a:solidFill>
                   <a:srgbClr val="0A1A3F"/>
                 </a:solidFill>
-                <a:latin typeface="Georgia" pitchFamily="34" charset="0"/>
-                <a:ea typeface="Georgia" pitchFamily="34" charset="-122"/>
-                <a:cs typeface="Georgia" pitchFamily="34" charset="-120"/>
+                <a:latin typeface="Noto Sans CJK JP" pitchFamily="34" charset="0"/>
+                <a:ea typeface="Noto Sans CJK JP" pitchFamily="34" charset="-122"/>
+                <a:cs typeface="Noto Sans CJK JP" pitchFamily="34" charset="-120"/>
               </a:rPr>
               <a:t>近年の波</a:t>
             </a:r>
@@ -5556,9 +5556,9 @@
                 <a:solidFill>
                   <a:srgbClr val="5A6678"/>
                 </a:solidFill>
-                <a:latin typeface="Calibri" pitchFamily="34" charset="0"/>
-                <a:ea typeface="Calibri" pitchFamily="34" charset="-122"/>
-                <a:cs typeface="Calibri" pitchFamily="34" charset="-120"/>
+                <a:latin typeface="Noto Sans CJK JP" pitchFamily="34" charset="0"/>
+                <a:ea typeface="Noto Sans CJK JP" pitchFamily="34" charset="-122"/>
+                <a:cs typeface="Noto Sans CJK JP" pitchFamily="34" charset="-120"/>
               </a:rPr>
               <a:t>2022 好調（高ボラ）</a:t>
             </a:r>
@@ -5570,9 +5570,9 @@
                 <a:solidFill>
                   <a:srgbClr val="C9A227"/>
                 </a:solidFill>
-                <a:latin typeface="Calibri" pitchFamily="34" charset="0"/>
-                <a:ea typeface="Calibri" pitchFamily="34" charset="-122"/>
-                <a:cs typeface="Calibri" pitchFamily="34" charset="-120"/>
+                <a:latin typeface="Noto Sans CJK JP" pitchFamily="34" charset="0"/>
+                <a:ea typeface="Noto Sans CJK JP" pitchFamily="34" charset="-122"/>
+                <a:cs typeface="Noto Sans CJK JP" pitchFamily="34" charset="-120"/>
               </a:rPr>
               <a:t>  →  </a:t>
             </a:r>
@@ -5584,9 +5584,9 @@
                 <a:solidFill>
                   <a:srgbClr val="5A6678"/>
                 </a:solidFill>
-                <a:latin typeface="Calibri" pitchFamily="34" charset="0"/>
-                <a:ea typeface="Calibri" pitchFamily="34" charset="-122"/>
-                <a:cs typeface="Calibri" pitchFamily="34" charset="-120"/>
+                <a:latin typeface="Noto Sans CJK JP" pitchFamily="34" charset="0"/>
+                <a:ea typeface="Noto Sans CJK JP" pitchFamily="34" charset="-122"/>
+                <a:cs typeface="Noto Sans CJK JP" pitchFamily="34" charset="-120"/>
               </a:rPr>
               <a:t>2023 減速</a:t>
             </a:r>
@@ -5598,9 +5598,9 @@
                 <a:solidFill>
                   <a:srgbClr val="C9A227"/>
                 </a:solidFill>
-                <a:latin typeface="Calibri" pitchFamily="34" charset="0"/>
-                <a:ea typeface="Calibri" pitchFamily="34" charset="-122"/>
-                <a:cs typeface="Calibri" pitchFamily="34" charset="-120"/>
+                <a:latin typeface="Noto Sans CJK JP" pitchFamily="34" charset="0"/>
+                <a:ea typeface="Noto Sans CJK JP" pitchFamily="34" charset="-122"/>
+                <a:cs typeface="Noto Sans CJK JP" pitchFamily="34" charset="-120"/>
               </a:rPr>
               <a:t>  →  </a:t>
             </a:r>
@@ -5612,9 +5612,9 @@
                 <a:solidFill>
                   <a:srgbClr val="0A1A3F"/>
                 </a:solidFill>
-                <a:latin typeface="Calibri" pitchFamily="34" charset="0"/>
-                <a:ea typeface="Calibri" pitchFamily="34" charset="-122"/>
-                <a:cs typeface="Calibri" pitchFamily="34" charset="-120"/>
+                <a:latin typeface="Noto Sans CJK JP" pitchFamily="34" charset="0"/>
+                <a:ea typeface="Noto Sans CJK JP" pitchFamily="34" charset="-122"/>
+                <a:cs typeface="Noto Sans CJK JP" pitchFamily="34" charset="-120"/>
               </a:rPr>
               <a:t>2024 V字（Equities過去最高）</a:t>
             </a:r>
@@ -5651,9 +5651,9 @@
                 <a:solidFill>
                   <a:srgbClr val="5A6678"/>
                 </a:solidFill>
-                <a:latin typeface="Calibri" pitchFamily="34" charset="0"/>
-                <a:ea typeface="Calibri" pitchFamily="34" charset="-122"/>
-                <a:cs typeface="Calibri" pitchFamily="34" charset="-120"/>
+                <a:latin typeface="Noto Sans CJK JP" pitchFamily="34" charset="0"/>
+                <a:ea typeface="Noto Sans CJK JP" pitchFamily="34" charset="-122"/>
+                <a:cs typeface="Noto Sans CJK JP" pitchFamily="34" charset="-120"/>
               </a:rPr>
               <a:t>11</a:t>
             </a:r>
@@ -5722,9 +5722,9 @@
                 <a:solidFill>
                   <a:srgbClr val="C9A227"/>
                 </a:solidFill>
-                <a:latin typeface="Calibri" pitchFamily="34" charset="0"/>
-                <a:ea typeface="Calibri" pitchFamily="34" charset="-122"/>
-                <a:cs typeface="Calibri" pitchFamily="34" charset="-120"/>
+                <a:latin typeface="Noto Sans CJK JP" pitchFamily="34" charset="0"/>
+                <a:ea typeface="Noto Sans CJK JP" pitchFamily="34" charset="-122"/>
+                <a:cs typeface="Noto Sans CJK JP" pitchFamily="34" charset="-120"/>
               </a:rPr>
               <a:t>ONE STRATEGY</a:t>
             </a:r>
@@ -5761,9 +5761,9 @@
                 <a:solidFill>
                   <a:srgbClr val="0A1A3F"/>
                 </a:solidFill>
-                <a:latin typeface="Georgia" pitchFamily="34" charset="0"/>
-                <a:ea typeface="Georgia" pitchFamily="34" charset="-122"/>
-                <a:cs typeface="Georgia" pitchFamily="34" charset="-120"/>
+                <a:latin typeface="Noto Sans CJK JP" pitchFamily="34" charset="0"/>
+                <a:ea typeface="Noto Sans CJK JP" pitchFamily="34" charset="-122"/>
+                <a:cs typeface="Noto Sans CJK JP" pitchFamily="34" charset="-120"/>
               </a:rPr>
               <a:t>1本の背骨：durable revenues と「規律ある撤退」</a:t>
             </a:r>
@@ -5820,9 +5820,9 @@
                 <a:solidFill>
                   <a:srgbClr val="0A1A3F"/>
                 </a:solidFill>
-                <a:latin typeface="Georgia" pitchFamily="34" charset="0"/>
-                <a:ea typeface="Georgia" pitchFamily="34" charset="-122"/>
-                <a:cs typeface="Georgia" pitchFamily="34" charset="-120"/>
+                <a:latin typeface="Noto Sans CJK JP" pitchFamily="34" charset="0"/>
+                <a:ea typeface="Noto Sans CJK JP" pitchFamily="34" charset="-122"/>
+                <a:cs typeface="Noto Sans CJK JP" pitchFamily="34" charset="-120"/>
               </a:rPr>
               <a:t>両部門に共通の戦略</a:t>
             </a:r>
@@ -5884,9 +5884,9 @@
                 <a:solidFill>
                   <a:srgbClr val="5A6678"/>
                 </a:solidFill>
-                <a:latin typeface="Georgia" pitchFamily="34" charset="0"/>
-                <a:ea typeface="Georgia" pitchFamily="34" charset="-122"/>
-                <a:cs typeface="Georgia" pitchFamily="34" charset="-120"/>
+                <a:latin typeface="Noto Sans CJK JP" pitchFamily="34" charset="0"/>
+                <a:ea typeface="Noto Sans CJK JP" pitchFamily="34" charset="-122"/>
+                <a:cs typeface="Noto Sans CJK JP" pitchFamily="34" charset="-120"/>
               </a:rPr>
               <a:t>変動</a:t>
             </a:r>
@@ -5923,9 +5923,9 @@
                 <a:solidFill>
                   <a:srgbClr val="1B2436"/>
                 </a:solidFill>
-                <a:latin typeface="Calibri" pitchFamily="34" charset="0"/>
-                <a:ea typeface="Calibri" pitchFamily="34" charset="-122"/>
-                <a:cs typeface="Calibri" pitchFamily="34" charset="-120"/>
+                <a:latin typeface="Noto Sans CJK JP" pitchFamily="34" charset="0"/>
+                <a:ea typeface="Noto Sans CJK JP" pitchFamily="34" charset="-122"/>
+                <a:cs typeface="Noto Sans CJK JP" pitchFamily="34" charset="-120"/>
               </a:rPr>
               <a:t>自己投資</a:t>
             </a:r>
@@ -5940,9 +5940,9 @@
                 <a:solidFill>
                   <a:srgbClr val="1B2436"/>
                 </a:solidFill>
-                <a:latin typeface="Calibri" pitchFamily="34" charset="0"/>
-                <a:ea typeface="Calibri" pitchFamily="34" charset="-122"/>
-                <a:cs typeface="Calibri" pitchFamily="34" charset="-120"/>
+                <a:latin typeface="Noto Sans CJK JP" pitchFamily="34" charset="0"/>
+                <a:ea typeface="Noto Sans CJK JP" pitchFamily="34" charset="-122"/>
+                <a:cs typeface="Noto Sans CJK JP" pitchFamily="34" charset="-120"/>
               </a:rPr>
               <a:t>マーケットメイク</a:t>
             </a:r>
@@ -6023,9 +6023,9 @@
                 <a:solidFill>
                   <a:srgbClr val="E8B84B"/>
                 </a:solidFill>
-                <a:latin typeface="Georgia" pitchFamily="34" charset="0"/>
-                <a:ea typeface="Georgia" pitchFamily="34" charset="-122"/>
-                <a:cs typeface="Georgia" pitchFamily="34" charset="-120"/>
+                <a:latin typeface="Noto Sans CJK JP" pitchFamily="34" charset="0"/>
+                <a:ea typeface="Noto Sans CJK JP" pitchFamily="34" charset="-122"/>
+                <a:cs typeface="Noto Sans CJK JP" pitchFamily="34" charset="-120"/>
               </a:rPr>
               <a:t>安定</a:t>
             </a:r>
@@ -6062,9 +6062,9 @@
                 <a:solidFill>
                   <a:srgbClr val="FFFFFF"/>
                 </a:solidFill>
-                <a:latin typeface="Calibri" pitchFamily="34" charset="0"/>
-                <a:ea typeface="Calibri" pitchFamily="34" charset="-122"/>
-                <a:cs typeface="Calibri" pitchFamily="34" charset="-120"/>
+                <a:latin typeface="Noto Sans CJK JP" pitchFamily="34" charset="0"/>
+                <a:ea typeface="Noto Sans CJK JP" pitchFamily="34" charset="-122"/>
+                <a:cs typeface="Noto Sans CJK JP" pitchFamily="34" charset="-120"/>
               </a:rPr>
               <a:t>運用フィー</a:t>
             </a:r>
@@ -6079,9 +6079,9 @@
                 <a:solidFill>
                   <a:srgbClr val="FFFFFF"/>
                 </a:solidFill>
-                <a:latin typeface="Calibri" pitchFamily="34" charset="0"/>
-                <a:ea typeface="Calibri" pitchFamily="34" charset="-122"/>
-                <a:cs typeface="Calibri" pitchFamily="34" charset="-120"/>
+                <a:latin typeface="Noto Sans CJK JP" pitchFamily="34" charset="0"/>
+                <a:ea typeface="Noto Sans CJK JP" pitchFamily="34" charset="-122"/>
+                <a:cs typeface="Noto Sans CJK JP" pitchFamily="34" charset="-120"/>
               </a:rPr>
               <a:t>ファイナンシング</a:t>
             </a:r>
@@ -6143,9 +6143,9 @@
                 <a:solidFill>
                   <a:srgbClr val="0A1A3F"/>
                 </a:solidFill>
-                <a:latin typeface="Calibri" pitchFamily="34" charset="0"/>
-                <a:ea typeface="Calibri" pitchFamily="34" charset="-122"/>
-                <a:cs typeface="Calibri" pitchFamily="34" charset="-120"/>
+                <a:latin typeface="Noto Sans CJK JP" pitchFamily="34" charset="0"/>
+                <a:ea typeface="Noto Sans CJK JP" pitchFamily="34" charset="-122"/>
+                <a:cs typeface="Noto Sans CJK JP" pitchFamily="34" charset="-120"/>
               </a:rPr>
               <a:t>durable revenues（安定収益）を厚くする ＝ 全社一貫</a:t>
             </a:r>
@@ -6182,9 +6182,9 @@
                 <a:solidFill>
                   <a:srgbClr val="0A1A3F"/>
                 </a:solidFill>
-                <a:latin typeface="Georgia" pitchFamily="34" charset="0"/>
-                <a:ea typeface="Georgia" pitchFamily="34" charset="-122"/>
-                <a:cs typeface="Georgia" pitchFamily="34" charset="-120"/>
+                <a:latin typeface="Noto Sans CJK JP" pitchFamily="34" charset="0"/>
+                <a:ea typeface="Noto Sans CJK JP" pitchFamily="34" charset="-122"/>
+                <a:cs typeface="Noto Sans CJK JP" pitchFamily="34" charset="-120"/>
               </a:rPr>
               <a:t>消費者事業からの撤退</a:t>
             </a:r>
@@ -6248,9 +6248,9 @@
                 <a:solidFill>
                   <a:srgbClr val="FFFFFF"/>
                 </a:solidFill>
-                <a:latin typeface="Georgia" pitchFamily="34" charset="0"/>
-                <a:ea typeface="Georgia" pitchFamily="34" charset="-122"/>
-                <a:cs typeface="Georgia" pitchFamily="34" charset="-120"/>
+                <a:latin typeface="Noto Sans CJK JP" pitchFamily="34" charset="0"/>
+                <a:ea typeface="Noto Sans CJK JP" pitchFamily="34" charset="-122"/>
+                <a:cs typeface="Noto Sans CJK JP" pitchFamily="34" charset="-120"/>
               </a:rPr>
               <a:t>$6B超</a:t>
             </a:r>
@@ -6262,9 +6262,9 @@
                 <a:solidFill>
                   <a:srgbClr val="CBD5E8"/>
                 </a:solidFill>
-                <a:latin typeface="Georgia" pitchFamily="34" charset="0"/>
-                <a:ea typeface="Georgia" pitchFamily="34" charset="-122"/>
-                <a:cs typeface="Georgia" pitchFamily="34" charset="-120"/>
+                <a:latin typeface="Noto Sans CJK JP" pitchFamily="34" charset="0"/>
+                <a:ea typeface="Noto Sans CJK JP" pitchFamily="34" charset="-122"/>
+                <a:cs typeface="Noto Sans CJK JP" pitchFamily="34" charset="-120"/>
               </a:rPr>
               <a:t>  の消費者貸付損失（2020〜）</a:t>
             </a:r>
@@ -6301,9 +6301,9 @@
                 <a:solidFill>
                   <a:srgbClr val="E8B84B"/>
                 </a:solidFill>
-                <a:latin typeface="Calibri" pitchFamily="34" charset="0"/>
-                <a:ea typeface="Calibri" pitchFamily="34" charset="-122"/>
-                <a:cs typeface="Calibri" pitchFamily="34" charset="-120"/>
+                <a:latin typeface="Noto Sans CJK JP" pitchFamily="34" charset="0"/>
+                <a:ea typeface="Noto Sans CJK JP" pitchFamily="34" charset="-122"/>
+                <a:cs typeface="Noto Sans CJK JP" pitchFamily="34" charset="-120"/>
               </a:rPr>
               <a:t>Marcus / Apple Card / GreenSky</a:t>
             </a:r>
@@ -6369,9 +6369,9 @@
                 <a:solidFill>
                   <a:srgbClr val="1B2436"/>
                 </a:solidFill>
-                <a:latin typeface="Calibri" pitchFamily="34" charset="0"/>
-                <a:ea typeface="Calibri" pitchFamily="34" charset="-122"/>
-                <a:cs typeface="Calibri" pitchFamily="34" charset="-120"/>
+                <a:latin typeface="Noto Sans CJK JP" pitchFamily="34" charset="0"/>
+                <a:ea typeface="Noto Sans CJK JP" pitchFamily="34" charset="-122"/>
+                <a:cs typeface="Noto Sans CJK JP" pitchFamily="34" charset="-120"/>
               </a:rPr>
               <a:t>GreenSky：$1.73Bで取得 → 約$500Mで売却</a:t>
             </a:r>
@@ -6390,9 +6390,9 @@
                 <a:solidFill>
                   <a:srgbClr val="1B2436"/>
                 </a:solidFill>
-                <a:latin typeface="Calibri" pitchFamily="34" charset="0"/>
-                <a:ea typeface="Calibri" pitchFamily="34" charset="-122"/>
-                <a:cs typeface="Calibri" pitchFamily="34" charset="-120"/>
+                <a:latin typeface="Noto Sans CJK JP" pitchFamily="34" charset="0"/>
+                <a:ea typeface="Noto Sans CJK JP" pitchFamily="34" charset="-122"/>
+                <a:cs typeface="Noto Sans CJK JP" pitchFamily="34" charset="-120"/>
               </a:rPr>
               <a:t>Apple Card は JPMorgan へ移管</a:t>
             </a:r>
@@ -6476,9 +6476,9 @@
                 <a:solidFill>
                   <a:srgbClr val="E8B84B"/>
                 </a:solidFill>
-                <a:latin typeface="Calibri" pitchFamily="34" charset="0"/>
-                <a:ea typeface="Calibri" pitchFamily="34" charset="-122"/>
-                <a:cs typeface="Calibri" pitchFamily="34" charset="-120"/>
+                <a:latin typeface="Noto Sans CJK JP" pitchFamily="34" charset="0"/>
+                <a:ea typeface="Noto Sans CJK JP" pitchFamily="34" charset="-122"/>
+                <a:cs typeface="Noto Sans CJK JP" pitchFamily="34" charset="-120"/>
               </a:rPr>
               <a:t>メッセージ</a:t>
             </a:r>
@@ -6515,9 +6515,9 @@
                 <a:solidFill>
                   <a:srgbClr val="FFFFFF"/>
                 </a:solidFill>
-                <a:latin typeface="Georgia" pitchFamily="34" charset="0"/>
-                <a:ea typeface="Georgia" pitchFamily="34" charset="-122"/>
-                <a:cs typeface="Georgia" pitchFamily="34" charset="-120"/>
+                <a:latin typeface="Noto Sans CJK JP" pitchFamily="34" charset="0"/>
+                <a:ea typeface="Noto Sans CJK JP" pitchFamily="34" charset="-122"/>
+                <a:cs typeface="Noto Sans CJK JP" pitchFamily="34" charset="-120"/>
               </a:rPr>
               <a:t>失敗を認め、得意領域（IB・Markets・オルタナ・UHNW）へ回帰。</a:t>
             </a:r>
@@ -6554,9 +6554,9 @@
                 <a:solidFill>
                   <a:srgbClr val="5A6678"/>
                 </a:solidFill>
-                <a:latin typeface="Calibri" pitchFamily="34" charset="0"/>
-                <a:ea typeface="Calibri" pitchFamily="34" charset="-122"/>
-                <a:cs typeface="Calibri" pitchFamily="34" charset="-120"/>
+                <a:latin typeface="Noto Sans CJK JP" pitchFamily="34" charset="0"/>
+                <a:ea typeface="Noto Sans CJK JP" pitchFamily="34" charset="-122"/>
+                <a:cs typeface="Noto Sans CJK JP" pitchFamily="34" charset="-120"/>
               </a:rPr>
               <a:t>12</a:t>
             </a:r>
@@ -6625,9 +6625,9 @@
                 <a:solidFill>
                   <a:srgbClr val="C9A227"/>
                 </a:solidFill>
-                <a:latin typeface="Calibri" pitchFamily="34" charset="0"/>
-                <a:ea typeface="Calibri" pitchFamily="34" charset="-122"/>
-                <a:cs typeface="Calibri" pitchFamily="34" charset="-120"/>
+                <a:latin typeface="Noto Sans CJK JP" pitchFamily="34" charset="0"/>
+                <a:ea typeface="Noto Sans CJK JP" pitchFamily="34" charset="-122"/>
+                <a:cs typeface="Noto Sans CJK JP" pitchFamily="34" charset="-120"/>
               </a:rPr>
               <a:t>KEY RISKS</a:t>
             </a:r>
@@ -6664,9 +6664,9 @@
                 <a:solidFill>
                   <a:srgbClr val="0A1A3F"/>
                 </a:solidFill>
-                <a:latin typeface="Georgia" pitchFamily="34" charset="0"/>
-                <a:ea typeface="Georgia" pitchFamily="34" charset="-122"/>
-                <a:cs typeface="Georgia" pitchFamily="34" charset="-120"/>
+                <a:latin typeface="Noto Sans CJK JP" pitchFamily="34" charset="0"/>
+                <a:ea typeface="Noto Sans CJK JP" pitchFamily="34" charset="-122"/>
+                <a:cs typeface="Noto Sans CJK JP" pitchFamily="34" charset="-120"/>
               </a:rPr>
               <a:t>リスク：強さの裏側</a:t>
             </a:r>
@@ -6819,9 +6819,9 @@
                 <a:solidFill>
                   <a:srgbClr val="0A1A3F"/>
                 </a:solidFill>
-                <a:latin typeface="Georgia" pitchFamily="34" charset="0"/>
-                <a:ea typeface="Georgia" pitchFamily="34" charset="-122"/>
-                <a:cs typeface="Georgia" pitchFamily="34" charset="-120"/>
+                <a:latin typeface="Noto Sans CJK JP" pitchFamily="34" charset="0"/>
+                <a:ea typeface="Noto Sans CJK JP" pitchFamily="34" charset="-122"/>
+                <a:cs typeface="Noto Sans CJK JP" pitchFamily="34" charset="-120"/>
               </a:rPr>
               <a:t>景気循環性</a:t>
             </a:r>
@@ -6858,9 +6858,9 @@
                 <a:solidFill>
                   <a:srgbClr val="1B2436"/>
                 </a:solidFill>
-                <a:latin typeface="Calibri" pitchFamily="34" charset="0"/>
-                <a:ea typeface="Calibri" pitchFamily="34" charset="-122"/>
-                <a:cs typeface="Calibri" pitchFamily="34" charset="-120"/>
+                <a:latin typeface="Noto Sans CJK JP" pitchFamily="34" charset="0"/>
+                <a:ea typeface="Noto Sans CJK JP" pitchFamily="34" charset="-122"/>
+                <a:cs typeface="Noto Sans CJK JP" pitchFamily="34" charset="-120"/>
               </a:rPr>
               <a:t>IB・トレーディングは市況依存。2023の急減がそれを示す。</a:t>
             </a:r>
@@ -6993,9 +6993,9 @@
                 <a:solidFill>
                   <a:srgbClr val="0A1A3F"/>
                 </a:solidFill>
-                <a:latin typeface="Georgia" pitchFamily="34" charset="0"/>
-                <a:ea typeface="Georgia" pitchFamily="34" charset="-122"/>
-                <a:cs typeface="Georgia" pitchFamily="34" charset="-120"/>
+                <a:latin typeface="Noto Sans CJK JP" pitchFamily="34" charset="0"/>
+                <a:ea typeface="Noto Sans CJK JP" pitchFamily="34" charset="-122"/>
+                <a:cs typeface="Noto Sans CJK JP" pitchFamily="34" charset="-120"/>
               </a:rPr>
               <a:t>規制資本</a:t>
             </a:r>
@@ -7032,9 +7032,9 @@
                 <a:solidFill>
                   <a:srgbClr val="1B2436"/>
                 </a:solidFill>
-                <a:latin typeface="Calibri" pitchFamily="34" charset="0"/>
-                <a:ea typeface="Calibri" pitchFamily="34" charset="-122"/>
-                <a:cs typeface="Calibri" pitchFamily="34" charset="-120"/>
+                <a:latin typeface="Noto Sans CJK JP" pitchFamily="34" charset="0"/>
+                <a:ea typeface="Noto Sans CJK JP" pitchFamily="34" charset="-122"/>
+                <a:cs typeface="Noto Sans CJK JP" pitchFamily="34" charset="-120"/>
               </a:rPr>
               <a:t>バーゼルⅢ最終化（緩和方向だが不確実性が残る）。</a:t>
             </a:r>
@@ -7167,9 +7167,9 @@
                 <a:solidFill>
                   <a:srgbClr val="0A1A3F"/>
                 </a:solidFill>
-                <a:latin typeface="Georgia" pitchFamily="34" charset="0"/>
-                <a:ea typeface="Georgia" pitchFamily="34" charset="-122"/>
-                <a:cs typeface="Georgia" pitchFamily="34" charset="-120"/>
+                <a:latin typeface="Noto Sans CJK JP" pitchFamily="34" charset="0"/>
+                <a:ea typeface="Noto Sans CJK JP" pitchFamily="34" charset="-122"/>
+                <a:cs typeface="Noto Sans CJK JP" pitchFamily="34" charset="-120"/>
               </a:rPr>
               <a:t>訴訟・レピュテーション</a:t>
             </a:r>
@@ -7206,9 +7206,9 @@
                 <a:solidFill>
                   <a:srgbClr val="1B2436"/>
                 </a:solidFill>
-                <a:latin typeface="Calibri" pitchFamily="34" charset="0"/>
-                <a:ea typeface="Calibri" pitchFamily="34" charset="-122"/>
-                <a:cs typeface="Calibri" pitchFamily="34" charset="-120"/>
+                <a:latin typeface="Noto Sans CJK JP" pitchFamily="34" charset="0"/>
+                <a:ea typeface="Noto Sans CJK JP" pitchFamily="34" charset="-122"/>
+                <a:cs typeface="Noto Sans CJK JP" pitchFamily="34" charset="-120"/>
               </a:rPr>
               <a:t>1MDB事件で約$2.9Bの制裁金（2020年）。</a:t>
             </a:r>
@@ -7341,9 +7341,9 @@
                 <a:solidFill>
                   <a:srgbClr val="0A1A3F"/>
                 </a:solidFill>
-                <a:latin typeface="Georgia" pitchFamily="34" charset="0"/>
-                <a:ea typeface="Georgia" pitchFamily="34" charset="-122"/>
-                <a:cs typeface="Georgia" pitchFamily="34" charset="-120"/>
+                <a:latin typeface="Noto Sans CJK JP" pitchFamily="34" charset="0"/>
+                <a:ea typeface="Noto Sans CJK JP" pitchFamily="34" charset="-122"/>
+                <a:cs typeface="Noto Sans CJK JP" pitchFamily="34" charset="-120"/>
               </a:rPr>
               <a:t>戦略実行</a:t>
             </a:r>
@@ -7380,9 +7380,9 @@
                 <a:solidFill>
                   <a:srgbClr val="1B2436"/>
                 </a:solidFill>
-                <a:latin typeface="Calibri" pitchFamily="34" charset="0"/>
-                <a:ea typeface="Calibri" pitchFamily="34" charset="-122"/>
-                <a:cs typeface="Calibri" pitchFamily="34" charset="-120"/>
+                <a:latin typeface="Noto Sans CJK JP" pitchFamily="34" charset="0"/>
+                <a:ea typeface="Noto Sans CJK JP" pitchFamily="34" charset="-122"/>
+                <a:cs typeface="Noto Sans CJK JP" pitchFamily="34" charset="-120"/>
               </a:rPr>
               <a:t>消費者撤退コスト、Platform黒字化の遅れ。</a:t>
             </a:r>
@@ -7419,9 +7419,9 @@
                 <a:solidFill>
                   <a:srgbClr val="5A6678"/>
                 </a:solidFill>
-                <a:latin typeface="Calibri" pitchFamily="34" charset="0"/>
-                <a:ea typeface="Calibri" pitchFamily="34" charset="-122"/>
-                <a:cs typeface="Calibri" pitchFamily="34" charset="-120"/>
+                <a:latin typeface="Noto Sans CJK JP" pitchFamily="34" charset="0"/>
+                <a:ea typeface="Noto Sans CJK JP" pitchFamily="34" charset="-122"/>
+                <a:cs typeface="Noto Sans CJK JP" pitchFamily="34" charset="-120"/>
               </a:rPr>
               <a:t>13</a:t>
             </a:r>
@@ -7490,9 +7490,9 @@
                 <a:solidFill>
                   <a:srgbClr val="C9A227"/>
                 </a:solidFill>
-                <a:latin typeface="Calibri" pitchFamily="34" charset="0"/>
-                <a:ea typeface="Calibri" pitchFamily="34" charset="-122"/>
-                <a:cs typeface="Calibri" pitchFamily="34" charset="-120"/>
+                <a:latin typeface="Noto Sans CJK JP" pitchFamily="34" charset="0"/>
+                <a:ea typeface="Noto Sans CJK JP" pitchFamily="34" charset="-122"/>
+                <a:cs typeface="Noto Sans CJK JP" pitchFamily="34" charset="-120"/>
               </a:rPr>
               <a:t>JAPAN &amp; CAREERS</a:t>
             </a:r>
@@ -7529,9 +7529,9 @@
                 <a:solidFill>
                   <a:srgbClr val="0A1A3F"/>
                 </a:solidFill>
-                <a:latin typeface="Georgia" pitchFamily="34" charset="0"/>
-                <a:ea typeface="Georgia" pitchFamily="34" charset="-122"/>
-                <a:cs typeface="Georgia" pitchFamily="34" charset="-120"/>
+                <a:latin typeface="Noto Sans CJK JP" pitchFamily="34" charset="0"/>
+                <a:ea typeface="Noto Sans CJK JP" pitchFamily="34" charset="-122"/>
+                <a:cs typeface="Noto Sans CJK JP" pitchFamily="34" charset="-120"/>
               </a:rPr>
               <a:t>日本拠点と就活の視点</a:t>
             </a:r>
@@ -7664,9 +7664,9 @@
                 <a:solidFill>
                   <a:srgbClr val="FFFFFF"/>
                 </a:solidFill>
-                <a:latin typeface="Georgia" pitchFamily="34" charset="0"/>
-                <a:ea typeface="Georgia" pitchFamily="34" charset="-122"/>
-                <a:cs typeface="Georgia" pitchFamily="34" charset="-120"/>
+                <a:latin typeface="Noto Sans CJK JP" pitchFamily="34" charset="0"/>
+                <a:ea typeface="Noto Sans CJK JP" pitchFamily="34" charset="-122"/>
+                <a:cs typeface="Noto Sans CJK JP" pitchFamily="34" charset="-120"/>
               </a:rPr>
               <a:t>Goldman Sachs Japan</a:t>
             </a:r>
@@ -7707,9 +7707,9 @@
                 <a:solidFill>
                   <a:srgbClr val="1B2436"/>
                 </a:solidFill>
-                <a:latin typeface="Calibri" pitchFamily="34" charset="0"/>
-                <a:ea typeface="Calibri" pitchFamily="34" charset="-122"/>
-                <a:cs typeface="Calibri" pitchFamily="34" charset="-120"/>
+                <a:latin typeface="Noto Sans CJK JP" pitchFamily="34" charset="0"/>
+                <a:ea typeface="Noto Sans CJK JP" pitchFamily="34" charset="-122"/>
+                <a:cs typeface="Noto Sans CJK JP" pitchFamily="34" charset="-120"/>
               </a:rPr>
               <a:t>東京拠点 1974年〜、六本木ヒルズ</a:t>
             </a:r>
@@ -7728,9 +7728,9 @@
                 <a:solidFill>
                   <a:srgbClr val="1B2436"/>
                 </a:solidFill>
-                <a:latin typeface="Calibri" pitchFamily="34" charset="0"/>
-                <a:ea typeface="Calibri" pitchFamily="34" charset="-122"/>
-                <a:cs typeface="Calibri" pitchFamily="34" charset="-120"/>
+                <a:latin typeface="Noto Sans CJK JP" pitchFamily="34" charset="0"/>
+                <a:ea typeface="Noto Sans CJK JP" pitchFamily="34" charset="-122"/>
+                <a:cs typeface="Noto Sans CJK JP" pitchFamily="34" charset="-120"/>
               </a:rPr>
               <a:t>GS証券 ＋ GSアセット・マネジメント</a:t>
             </a:r>
@@ -7749,9 +7749,9 @@
                 <a:solidFill>
                   <a:srgbClr val="1B2436"/>
                 </a:solidFill>
-                <a:latin typeface="Calibri" pitchFamily="34" charset="0"/>
-                <a:ea typeface="Calibri" pitchFamily="34" charset="-122"/>
-                <a:cs typeface="Calibri" pitchFamily="34" charset="-120"/>
+                <a:latin typeface="Noto Sans CJK JP" pitchFamily="34" charset="0"/>
+                <a:ea typeface="Noto Sans CJK JP" pitchFamily="34" charset="-122"/>
+                <a:cs typeface="Noto Sans CJK JP" pitchFamily="34" charset="-120"/>
               </a:rPr>
               <a:t>部門：証券（営業）／アセマネ／IBD／</a:t>
             </a:r>
@@ -7769,9 +7769,9 @@
                 <a:solidFill>
                   <a:srgbClr val="1B2436"/>
                 </a:solidFill>
-                <a:latin typeface="Calibri" pitchFamily="34" charset="0"/>
-                <a:ea typeface="Calibri" pitchFamily="34" charset="-122"/>
-                <a:cs typeface="Calibri" pitchFamily="34" charset="-120"/>
+                <a:latin typeface="Noto Sans CJK JP" pitchFamily="34" charset="0"/>
+                <a:ea typeface="Noto Sans CJK JP" pitchFamily="34" charset="-122"/>
+                <a:cs typeface="Noto Sans CJK JP" pitchFamily="34" charset="-120"/>
               </a:rPr>
               <a:t>投資調査／エンジニアリング</a:t>
             </a:r>
@@ -7884,9 +7884,9 @@
                 <a:solidFill>
                   <a:srgbClr val="0A1A3F"/>
                 </a:solidFill>
-                <a:latin typeface="Georgia" pitchFamily="34" charset="0"/>
-                <a:ea typeface="Georgia" pitchFamily="34" charset="-122"/>
-                <a:cs typeface="Georgia" pitchFamily="34" charset="-120"/>
+                <a:latin typeface="Noto Sans CJK JP" pitchFamily="34" charset="0"/>
+                <a:ea typeface="Noto Sans CJK JP" pitchFamily="34" charset="-122"/>
+                <a:cs typeface="Noto Sans CJK JP" pitchFamily="34" charset="-120"/>
               </a:rPr>
               <a:t>求める人材・選考</a:t>
             </a:r>
@@ -7927,9 +7927,9 @@
                 <a:solidFill>
                   <a:srgbClr val="1B2436"/>
                 </a:solidFill>
-                <a:latin typeface="Calibri" pitchFamily="34" charset="0"/>
-                <a:ea typeface="Calibri" pitchFamily="34" charset="-122"/>
-                <a:cs typeface="Calibri" pitchFamily="34" charset="-120"/>
+                <a:latin typeface="Noto Sans CJK JP" pitchFamily="34" charset="0"/>
+                <a:ea typeface="Noto Sans CJK JP" pitchFamily="34" charset="-122"/>
+                <a:cs typeface="Noto Sans CJK JP" pitchFamily="34" charset="-120"/>
               </a:rPr>
               <a:t>資質：高い知性・行動力・倫理観（integrity）・チームワーク／日英バイリンガル必須</a:t>
             </a:r>
@@ -7948,9 +7948,9 @@
                 <a:solidFill>
                   <a:srgbClr val="1B2436"/>
                 </a:solidFill>
-                <a:latin typeface="Calibri" pitchFamily="34" charset="0"/>
-                <a:ea typeface="Calibri" pitchFamily="34" charset="-122"/>
-                <a:cs typeface="Calibri" pitchFamily="34" charset="-120"/>
+                <a:latin typeface="Noto Sans CJK JP" pitchFamily="34" charset="0"/>
+                <a:ea typeface="Noto Sans CJK JP" pitchFamily="34" charset="-122"/>
+                <a:cs typeface="Noto Sans CJK JP" pitchFamily="34" charset="-120"/>
               </a:rPr>
               <a:t>選考：ES → Webテスト → GD/面接 → 最終（部門別・併願可）</a:t>
             </a:r>
@@ -7969,9 +7969,9 @@
                 <a:solidFill>
                   <a:srgbClr val="1B2436"/>
                 </a:solidFill>
-                <a:latin typeface="Calibri" pitchFamily="34" charset="0"/>
-                <a:ea typeface="Calibri" pitchFamily="34" charset="-122"/>
-                <a:cs typeface="Calibri" pitchFamily="34" charset="-120"/>
+                <a:latin typeface="Noto Sans CJK JP" pitchFamily="34" charset="0"/>
+                <a:ea typeface="Noto Sans CJK JP" pitchFamily="34" charset="-122"/>
+                <a:cs typeface="Noto Sans CJK JP" pitchFamily="34" charset="-120"/>
               </a:rPr>
               <a:t>キャリア：Analyst → Associate → VP → MD。Exit：HF/PE/事業会社財務</a:t>
             </a:r>
@@ -7990,9 +7990,9 @@
                 <a:solidFill>
                   <a:srgbClr val="1B2436"/>
                 </a:solidFill>
-                <a:latin typeface="Calibri" pitchFamily="34" charset="0"/>
-                <a:ea typeface="Calibri" pitchFamily="34" charset="-122"/>
-                <a:cs typeface="Calibri" pitchFamily="34" charset="-120"/>
+                <a:latin typeface="Noto Sans CJK JP" pitchFamily="34" charset="0"/>
+                <a:ea typeface="Noto Sans CJK JP" pitchFamily="34" charset="-122"/>
+                <a:cs typeface="Noto Sans CJK JP" pitchFamily="34" charset="-120"/>
               </a:rPr>
               <a:t>文化：14のビジネス原則（第1条「顧客の利益を常に最優先」）</a:t>
             </a:r>
@@ -8029,9 +8029,9 @@
                 <a:solidFill>
                   <a:srgbClr val="5A6678"/>
                 </a:solidFill>
-                <a:latin typeface="Calibri" pitchFamily="34" charset="0"/>
-                <a:ea typeface="Calibri" pitchFamily="34" charset="-122"/>
-                <a:cs typeface="Calibri" pitchFamily="34" charset="-120"/>
+                <a:latin typeface="Noto Sans CJK JP" pitchFamily="34" charset="0"/>
+                <a:ea typeface="Noto Sans CJK JP" pitchFamily="34" charset="-122"/>
+                <a:cs typeface="Noto Sans CJK JP" pitchFamily="34" charset="-120"/>
               </a:rPr>
               <a:t>14</a:t>
             </a:r>
@@ -8100,9 +8100,9 @@
                 <a:solidFill>
                   <a:srgbClr val="C9A227"/>
                 </a:solidFill>
-                <a:latin typeface="Calibri" pitchFamily="34" charset="0"/>
-                <a:ea typeface="Calibri" pitchFamily="34" charset="-122"/>
-                <a:cs typeface="Calibri" pitchFamily="34" charset="-120"/>
+                <a:latin typeface="Noto Sans CJK JP" pitchFamily="34" charset="0"/>
+                <a:ea typeface="Noto Sans CJK JP" pitchFamily="34" charset="-122"/>
+                <a:cs typeface="Noto Sans CJK JP" pitchFamily="34" charset="-120"/>
               </a:rPr>
               <a:t>CONCLUSION</a:t>
             </a:r>
@@ -8139,9 +8139,9 @@
                 <a:solidFill>
                   <a:srgbClr val="FFFFFF"/>
                 </a:solidFill>
-                <a:latin typeface="Georgia" pitchFamily="34" charset="0"/>
-                <a:ea typeface="Georgia" pitchFamily="34" charset="-122"/>
-                <a:cs typeface="Georgia" pitchFamily="34" charset="-120"/>
+                <a:latin typeface="Noto Sans CJK JP" pitchFamily="34" charset="0"/>
+                <a:ea typeface="Noto Sans CJK JP" pitchFamily="34" charset="-122"/>
+                <a:cs typeface="Noto Sans CJK JP" pitchFamily="34" charset="-120"/>
               </a:rPr>
               <a:t>まとめ：面接で効く5つの視点</a:t>
             </a:r>
@@ -8223,9 +8223,9 @@
                 <a:solidFill>
                   <a:srgbClr val="0A1A3F"/>
                 </a:solidFill>
-                <a:latin typeface="Georgia" pitchFamily="34" charset="0"/>
-                <a:ea typeface="Georgia" pitchFamily="34" charset="-122"/>
-                <a:cs typeface="Georgia" pitchFamily="34" charset="-120"/>
+                <a:latin typeface="Noto Sans CJK JP" pitchFamily="34" charset="0"/>
+                <a:ea typeface="Noto Sans CJK JP" pitchFamily="34" charset="-122"/>
+                <a:cs typeface="Noto Sans CJK JP" pitchFamily="34" charset="-120"/>
               </a:rPr>
               <a:t>1</a:t>
             </a:r>
@@ -8262,9 +8262,9 @@
                 <a:solidFill>
                   <a:srgbClr val="FFFFFF"/>
                 </a:solidFill>
-                <a:latin typeface="Georgia" pitchFamily="34" charset="0"/>
-                <a:ea typeface="Georgia" pitchFamily="34" charset="-122"/>
-                <a:cs typeface="Georgia" pitchFamily="34" charset="-120"/>
+                <a:latin typeface="Noto Sans CJK JP" pitchFamily="34" charset="0"/>
+                <a:ea typeface="Noto Sans CJK JP" pitchFamily="34" charset="-122"/>
+                <a:cs typeface="Noto Sans CJK JP" pitchFamily="34" charset="-120"/>
               </a:rPr>
               <a:t>AWMと営業は同じ戦略の両輪</a:t>
             </a:r>
@@ -8321,9 +8321,9 @@
                 <a:solidFill>
                   <a:srgbClr val="E8B84B"/>
                 </a:solidFill>
-                <a:latin typeface="Calibri" pitchFamily="34" charset="0"/>
-                <a:ea typeface="Calibri" pitchFamily="34" charset="-122"/>
-                <a:cs typeface="Calibri" pitchFamily="34" charset="-120"/>
+                <a:latin typeface="Noto Sans CJK JP" pitchFamily="34" charset="0"/>
+                <a:ea typeface="Noto Sans CJK JP" pitchFamily="34" charset="-122"/>
+                <a:cs typeface="Noto Sans CJK JP" pitchFamily="34" charset="-120"/>
               </a:rPr>
               <a:t>変動 → 安定へ</a:t>
             </a:r>
@@ -8405,9 +8405,9 @@
                 <a:solidFill>
                   <a:srgbClr val="0A1A3F"/>
                 </a:solidFill>
-                <a:latin typeface="Georgia" pitchFamily="34" charset="0"/>
-                <a:ea typeface="Georgia" pitchFamily="34" charset="-122"/>
-                <a:cs typeface="Georgia" pitchFamily="34" charset="-120"/>
+                <a:latin typeface="Noto Sans CJK JP" pitchFamily="34" charset="0"/>
+                <a:ea typeface="Noto Sans CJK JP" pitchFamily="34" charset="-122"/>
+                <a:cs typeface="Noto Sans CJK JP" pitchFamily="34" charset="-120"/>
               </a:rPr>
               <a:t>2</a:t>
             </a:r>
@@ -8444,9 +8444,9 @@
                 <a:solidFill>
                   <a:srgbClr val="FFFFFF"/>
                 </a:solidFill>
-                <a:latin typeface="Georgia" pitchFamily="34" charset="0"/>
-                <a:ea typeface="Georgia" pitchFamily="34" charset="-122"/>
-                <a:cs typeface="Georgia" pitchFamily="34" charset="-120"/>
+                <a:latin typeface="Noto Sans CJK JP" pitchFamily="34" charset="0"/>
+                <a:ea typeface="Noto Sans CJK JP" pitchFamily="34" charset="-122"/>
+                <a:cs typeface="Noto Sans CJK JP" pitchFamily="34" charset="-120"/>
               </a:rPr>
               <a:t>AWMはマージン10%→28%</a:t>
             </a:r>
@@ -8503,9 +8503,9 @@
                 <a:solidFill>
                   <a:srgbClr val="E8B84B"/>
                 </a:solidFill>
-                <a:latin typeface="Calibri" pitchFamily="34" charset="0"/>
-                <a:ea typeface="Calibri" pitchFamily="34" charset="-122"/>
-                <a:cs typeface="Calibri" pitchFamily="34" charset="-120"/>
+                <a:latin typeface="Noto Sans CJK JP" pitchFamily="34" charset="0"/>
+                <a:ea typeface="Noto Sans CJK JP" pitchFamily="34" charset="-122"/>
+                <a:cs typeface="Noto Sans CJK JP" pitchFamily="34" charset="-120"/>
               </a:rPr>
               <a:t>“収益の質”が激変</a:t>
             </a:r>
@@ -8587,9 +8587,9 @@
                 <a:solidFill>
                   <a:srgbClr val="0A1A3F"/>
                 </a:solidFill>
-                <a:latin typeface="Georgia" pitchFamily="34" charset="0"/>
-                <a:ea typeface="Georgia" pitchFamily="34" charset="-122"/>
-                <a:cs typeface="Georgia" pitchFamily="34" charset="-120"/>
+                <a:latin typeface="Noto Sans CJK JP" pitchFamily="34" charset="0"/>
+                <a:ea typeface="Noto Sans CJK JP" pitchFamily="34" charset="-122"/>
+                <a:cs typeface="Noto Sans CJK JP" pitchFamily="34" charset="-120"/>
               </a:rPr>
               <a:t>3</a:t>
             </a:r>
@@ -8626,9 +8626,9 @@
                 <a:solidFill>
                   <a:srgbClr val="FFFFFF"/>
                 </a:solidFill>
-                <a:latin typeface="Georgia" pitchFamily="34" charset="0"/>
-                <a:ea typeface="Georgia" pitchFamily="34" charset="-122"/>
-                <a:cs typeface="Georgia" pitchFamily="34" charset="-120"/>
+                <a:latin typeface="Noto Sans CJK JP" pitchFamily="34" charset="0"/>
+                <a:ea typeface="Noto Sans CJK JP" pitchFamily="34" charset="-122"/>
+                <a:cs typeface="Noto Sans CJK JP" pitchFamily="34" charset="-120"/>
               </a:rPr>
               <a:t>規模より収益性</a:t>
             </a:r>
@@ -8685,9 +8685,9 @@
                 <a:solidFill>
                   <a:srgbClr val="E8B84B"/>
                 </a:solidFill>
-                <a:latin typeface="Calibri" pitchFamily="34" charset="0"/>
-                <a:ea typeface="Calibri" pitchFamily="34" charset="-122"/>
-                <a:cs typeface="Calibri" pitchFamily="34" charset="-120"/>
+                <a:latin typeface="Noto Sans CJK JP" pitchFamily="34" charset="0"/>
+                <a:ea typeface="Noto Sans CJK JP" pitchFamily="34" charset="-122"/>
+                <a:cs typeface="Noto Sans CJK JP" pitchFamily="34" charset="-120"/>
               </a:rPr>
               <a:t>BlackRockに規模で挑まない</a:t>
             </a:r>
@@ -8769,9 +8769,9 @@
                 <a:solidFill>
                   <a:srgbClr val="0A1A3F"/>
                 </a:solidFill>
-                <a:latin typeface="Georgia" pitchFamily="34" charset="0"/>
-                <a:ea typeface="Georgia" pitchFamily="34" charset="-122"/>
-                <a:cs typeface="Georgia" pitchFamily="34" charset="-120"/>
+                <a:latin typeface="Noto Sans CJK JP" pitchFamily="34" charset="0"/>
+                <a:ea typeface="Noto Sans CJK JP" pitchFamily="34" charset="-122"/>
+                <a:cs typeface="Noto Sans CJK JP" pitchFamily="34" charset="-120"/>
               </a:rPr>
               <a:t>4</a:t>
             </a:r>
@@ -8808,9 +8808,9 @@
                 <a:solidFill>
                   <a:srgbClr val="FFFFFF"/>
                 </a:solidFill>
-                <a:latin typeface="Georgia" pitchFamily="34" charset="0"/>
-                <a:ea typeface="Georgia" pitchFamily="34" charset="-122"/>
-                <a:cs typeface="Georgia" pitchFamily="34" charset="-120"/>
+                <a:latin typeface="Noto Sans CJK JP" pitchFamily="34" charset="0"/>
+                <a:ea typeface="Noto Sans CJK JP" pitchFamily="34" charset="-122"/>
+                <a:cs typeface="Noto Sans CJK JP" pitchFamily="34" charset="-120"/>
               </a:rPr>
               <a:t>規律ある撤退</a:t>
             </a:r>
@@ -8867,9 +8867,9 @@
                 <a:solidFill>
                   <a:srgbClr val="E8B84B"/>
                 </a:solidFill>
-                <a:latin typeface="Calibri" pitchFamily="34" charset="0"/>
-                <a:ea typeface="Calibri" pitchFamily="34" charset="-122"/>
-                <a:cs typeface="Calibri" pitchFamily="34" charset="-120"/>
+                <a:latin typeface="Noto Sans CJK JP" pitchFamily="34" charset="0"/>
+                <a:ea typeface="Noto Sans CJK JP" pitchFamily="34" charset="-122"/>
+                <a:cs typeface="Noto Sans CJK JP" pitchFamily="34" charset="-120"/>
               </a:rPr>
               <a:t>経営の自己規律</a:t>
             </a:r>
@@ -8951,9 +8951,9 @@
                 <a:solidFill>
                   <a:srgbClr val="0A1A3F"/>
                 </a:solidFill>
-                <a:latin typeface="Georgia" pitchFamily="34" charset="0"/>
-                <a:ea typeface="Georgia" pitchFamily="34" charset="-122"/>
-                <a:cs typeface="Georgia" pitchFamily="34" charset="-120"/>
+                <a:latin typeface="Noto Sans CJK JP" pitchFamily="34" charset="0"/>
+                <a:ea typeface="Noto Sans CJK JP" pitchFamily="34" charset="-122"/>
+                <a:cs typeface="Noto Sans CJK JP" pitchFamily="34" charset="-120"/>
               </a:rPr>
               <a:t>5</a:t>
             </a:r>
@@ -8990,9 +8990,9 @@
                 <a:solidFill>
                   <a:srgbClr val="FFFFFF"/>
                 </a:solidFill>
-                <a:latin typeface="Georgia" pitchFamily="34" charset="0"/>
-                <a:ea typeface="Georgia" pitchFamily="34" charset="-122"/>
-                <a:cs typeface="Georgia" pitchFamily="34" charset="-120"/>
+                <a:latin typeface="Noto Sans CJK JP" pitchFamily="34" charset="0"/>
+                <a:ea typeface="Noto Sans CJK JP" pitchFamily="34" charset="-122"/>
+                <a:cs typeface="Noto Sans CJK JP" pitchFamily="34" charset="-120"/>
               </a:rPr>
               <a:t>マクロ感応度</a:t>
             </a:r>
@@ -9049,9 +9049,9 @@
                 <a:solidFill>
                   <a:srgbClr val="E8B84B"/>
                 </a:solidFill>
-                <a:latin typeface="Calibri" pitchFamily="34" charset="0"/>
-                <a:ea typeface="Calibri" pitchFamily="34" charset="-122"/>
-                <a:cs typeface="Calibri" pitchFamily="34" charset="-120"/>
+                <a:latin typeface="Noto Sans CJK JP" pitchFamily="34" charset="0"/>
+                <a:ea typeface="Noto Sans CJK JP" pitchFamily="34" charset="-122"/>
+                <a:cs typeface="Noto Sans CJK JP" pitchFamily="34" charset="-120"/>
               </a:rPr>
               <a:t>ROE 7.5%→12.7% のV字</a:t>
             </a:r>
@@ -9120,9 +9120,9 @@
                 <a:solidFill>
                   <a:srgbClr val="C9A227"/>
                 </a:solidFill>
-                <a:latin typeface="Calibri" pitchFamily="34" charset="0"/>
-                <a:ea typeface="Calibri" pitchFamily="34" charset="-122"/>
-                <a:cs typeface="Calibri" pitchFamily="34" charset="-120"/>
+                <a:latin typeface="Noto Sans CJK JP" pitchFamily="34" charset="0"/>
+                <a:ea typeface="Noto Sans CJK JP" pitchFamily="34" charset="-122"/>
+                <a:cs typeface="Noto Sans CJK JP" pitchFamily="34" charset="-120"/>
               </a:rPr>
               <a:t>APPENDIX</a:t>
             </a:r>
@@ -9159,9 +9159,9 @@
                 <a:solidFill>
                   <a:srgbClr val="FFFFFF"/>
                 </a:solidFill>
-                <a:latin typeface="Georgia" pitchFamily="34" charset="0"/>
-                <a:ea typeface="Georgia" pitchFamily="34" charset="-122"/>
-                <a:cs typeface="Georgia" pitchFamily="34" charset="-120"/>
+                <a:latin typeface="Noto Sans CJK JP" pitchFamily="34" charset="0"/>
+                <a:ea typeface="Noto Sans CJK JP" pitchFamily="34" charset="-122"/>
+                <a:cs typeface="Noto Sans CJK JP" pitchFamily="34" charset="-120"/>
               </a:rPr>
               <a:t>出典と注記</a:t>
             </a:r>
@@ -9243,9 +9243,9 @@
                 <a:solidFill>
                   <a:srgbClr val="E8B84B"/>
                 </a:solidFill>
-                <a:latin typeface="Georgia" pitchFamily="34" charset="0"/>
-                <a:ea typeface="Georgia" pitchFamily="34" charset="-122"/>
-                <a:cs typeface="Georgia" pitchFamily="34" charset="-120"/>
+                <a:latin typeface="Noto Sans CJK JP" pitchFamily="34" charset="0"/>
+                <a:ea typeface="Noto Sans CJK JP" pitchFamily="34" charset="-122"/>
+                <a:cs typeface="Noto Sans CJK JP" pitchFamily="34" charset="-120"/>
               </a:rPr>
               <a:t>一次情報</a:t>
             </a:r>
@@ -9282,9 +9282,9 @@
                 <a:solidFill>
                   <a:srgbClr val="DDE3EF"/>
                 </a:solidFill>
-                <a:latin typeface="Calibri" pitchFamily="34" charset="0"/>
-                <a:ea typeface="Calibri" pitchFamily="34" charset="-122"/>
-                <a:cs typeface="Calibri" pitchFamily="34" charset="-120"/>
+                <a:latin typeface="Noto Sans CJK JP" pitchFamily="34" charset="0"/>
+                <a:ea typeface="Noto Sans CJK JP" pitchFamily="34" charset="-122"/>
+                <a:cs typeface="Noto Sans CJK JP" pitchFamily="34" charset="-120"/>
               </a:rPr>
               <a:t>GS FY2024/FY2023 10-K・決算リリース・Investor Day(2020/2023)・FICC and Equities事業説明</a:t>
             </a:r>
@@ -9366,9 +9366,9 @@
                 <a:solidFill>
                   <a:srgbClr val="E8B84B"/>
                 </a:solidFill>
-                <a:latin typeface="Georgia" pitchFamily="34" charset="0"/>
-                <a:ea typeface="Georgia" pitchFamily="34" charset="-122"/>
-                <a:cs typeface="Georgia" pitchFamily="34" charset="-120"/>
+                <a:latin typeface="Noto Sans CJK JP" pitchFamily="34" charset="0"/>
+                <a:ea typeface="Noto Sans CJK JP" pitchFamily="34" charset="-122"/>
+                <a:cs typeface="Noto Sans CJK JP" pitchFamily="34" charset="-120"/>
               </a:rPr>
               <a:t>報道</a:t>
             </a:r>
@@ -9405,9 +9405,9 @@
                 <a:solidFill>
                   <a:srgbClr val="DDE3EF"/>
                 </a:solidFill>
-                <a:latin typeface="Calibri" pitchFamily="34" charset="0"/>
-                <a:ea typeface="Calibri" pitchFamily="34" charset="-122"/>
-                <a:cs typeface="Calibri" pitchFamily="34" charset="-120"/>
+                <a:latin typeface="Noto Sans CJK JP" pitchFamily="34" charset="0"/>
+                <a:ea typeface="Noto Sans CJK JP" pitchFamily="34" charset="-122"/>
+                <a:cs typeface="Noto Sans CJK JP" pitchFamily="34" charset="-120"/>
               </a:rPr>
               <a:t>Reuters, CNBC, Bloomberg, Fortune, Banking Dive, wealthbriefing, privatebankerinternational, PwC, DOJ(1MDB)</a:t>
             </a:r>
@@ -9489,9 +9489,9 @@
                 <a:solidFill>
                   <a:srgbClr val="E8B84B"/>
                 </a:solidFill>
-                <a:latin typeface="Georgia" pitchFamily="34" charset="0"/>
-                <a:ea typeface="Georgia" pitchFamily="34" charset="-122"/>
-                <a:cs typeface="Georgia" pitchFamily="34" charset="-120"/>
+                <a:latin typeface="Noto Sans CJK JP" pitchFamily="34" charset="0"/>
+                <a:ea typeface="Noto Sans CJK JP" pitchFamily="34" charset="-122"/>
+                <a:cs typeface="Noto Sans CJK JP" pitchFamily="34" charset="-120"/>
               </a:rPr>
               <a:t>日本</a:t>
             </a:r>
@@ -9528,9 +9528,9 @@
                 <a:solidFill>
                   <a:srgbClr val="DDE3EF"/>
                 </a:solidFill>
-                <a:latin typeface="Calibri" pitchFamily="34" charset="0"/>
-                <a:ea typeface="Calibri" pitchFamily="34" charset="-122"/>
-                <a:cs typeface="Calibri" pitchFamily="34" charset="-120"/>
+                <a:latin typeface="Noto Sans CJK JP" pitchFamily="34" charset="0"/>
+                <a:ea typeface="Noto Sans CJK JP" pitchFamily="34" charset="-122"/>
+                <a:cs typeface="Noto Sans CJK JP" pitchFamily="34" charset="-120"/>
               </a:rPr>
               <a:t>goldmansachs.com/japan, am.gs.com, gBizINFO</a:t>
             </a:r>
@@ -9592,9 +9592,9 @@
                 <a:solidFill>
                   <a:srgbClr val="C9A227"/>
                 </a:solidFill>
-                <a:latin typeface="Georgia" pitchFamily="34" charset="0"/>
-                <a:ea typeface="Georgia" pitchFamily="34" charset="-122"/>
-                <a:cs typeface="Georgia" pitchFamily="34" charset="-120"/>
+                <a:latin typeface="Noto Sans CJK JP" pitchFamily="34" charset="0"/>
+                <a:ea typeface="Noto Sans CJK JP" pitchFamily="34" charset="-122"/>
+                <a:cs typeface="Noto Sans CJK JP" pitchFamily="34" charset="-120"/>
               </a:rPr>
               <a:t>注記</a:t>
             </a:r>
@@ -9631,9 +9631,9 @@
                 <a:solidFill>
                   <a:srgbClr val="AEBAD0"/>
                 </a:solidFill>
-                <a:latin typeface="Calibri" pitchFamily="34" charset="0"/>
-                <a:ea typeface="Calibri" pitchFamily="34" charset="-122"/>
-                <a:cs typeface="Calibri" pitchFamily="34" charset="-120"/>
+                <a:latin typeface="Noto Sans CJK JP" pitchFamily="34" charset="0"/>
+                <a:ea typeface="Noto Sans CJK JP" pitchFamily="34" charset="-122"/>
+                <a:cs typeface="Noto Sans CJK JP" pitchFamily="34" charset="-120"/>
               </a:rPr>
               <a:t>GBM/Platformの通期セグメント税前、ファイナンシング内訳、CET1詳細は10-Kセグメント表で要一次確認。数値はFY2024決算ベース。</a:t>
             </a:r>
@@ -9702,9 +9702,9 @@
                 <a:solidFill>
                   <a:srgbClr val="C9A227"/>
                 </a:solidFill>
-                <a:latin typeface="Calibri" pitchFamily="34" charset="0"/>
-                <a:ea typeface="Calibri" pitchFamily="34" charset="-122"/>
-                <a:cs typeface="Calibri" pitchFamily="34" charset="-120"/>
+                <a:latin typeface="Noto Sans CJK JP" pitchFamily="34" charset="0"/>
+                <a:ea typeface="Noto Sans CJK JP" pitchFamily="34" charset="-122"/>
+                <a:cs typeface="Noto Sans CJK JP" pitchFamily="34" charset="-120"/>
               </a:rPr>
               <a:t>EXECUTIVE SUMMARY</a:t>
             </a:r>
@@ -9741,9 +9741,9 @@
                 <a:solidFill>
                   <a:srgbClr val="0A1A3F"/>
                 </a:solidFill>
-                <a:latin typeface="Georgia" pitchFamily="34" charset="0"/>
-                <a:ea typeface="Georgia" pitchFamily="34" charset="-122"/>
-                <a:cs typeface="Georgia" pitchFamily="34" charset="-120"/>
+                <a:latin typeface="Noto Sans CJK JP" pitchFamily="34" charset="0"/>
+                <a:ea typeface="Noto Sans CJK JP" pitchFamily="34" charset="-122"/>
+                <a:cs typeface="Noto Sans CJK JP" pitchFamily="34" charset="-120"/>
               </a:rPr>
               <a:t>まず結論 — Goldman Sachsの今</a:t>
             </a:r>
@@ -9852,9 +9852,9 @@
                 <a:solidFill>
                   <a:srgbClr val="FFFFFF"/>
                 </a:solidFill>
-                <a:latin typeface="Georgia" pitchFamily="34" charset="0"/>
-                <a:ea typeface="Georgia" pitchFamily="34" charset="-122"/>
-                <a:cs typeface="Georgia" pitchFamily="34" charset="-120"/>
+                <a:latin typeface="Noto Sans CJK JP" pitchFamily="34" charset="0"/>
+                <a:ea typeface="Noto Sans CJK JP" pitchFamily="34" charset="-122"/>
+                <a:cs typeface="Noto Sans CJK JP" pitchFamily="34" charset="-120"/>
               </a:rPr>
               <a:t>① V字回復</a:t>
             </a:r>
@@ -9891,9 +9891,9 @@
                 <a:solidFill>
                   <a:srgbClr val="0A1A3F"/>
                 </a:solidFill>
-                <a:latin typeface="Georgia" pitchFamily="34" charset="0"/>
-                <a:ea typeface="Georgia" pitchFamily="34" charset="-122"/>
-                <a:cs typeface="Georgia" pitchFamily="34" charset="-120"/>
+                <a:latin typeface="Noto Sans CJK JP" pitchFamily="34" charset="0"/>
+                <a:ea typeface="Noto Sans CJK JP" pitchFamily="34" charset="-122"/>
+                <a:cs typeface="Noto Sans CJK JP" pitchFamily="34" charset="-120"/>
               </a:rPr>
               <a:t>12.7%</a:t>
             </a:r>
@@ -9930,9 +9930,9 @@
                 <a:solidFill>
                   <a:srgbClr val="5A6678"/>
                 </a:solidFill>
-                <a:latin typeface="Calibri" pitchFamily="34" charset="0"/>
-                <a:ea typeface="Calibri" pitchFamily="34" charset="-122"/>
-                <a:cs typeface="Calibri" pitchFamily="34" charset="-120"/>
+                <a:latin typeface="Noto Sans CJK JP" pitchFamily="34" charset="0"/>
+                <a:ea typeface="Noto Sans CJK JP" pitchFamily="34" charset="-122"/>
+                <a:cs typeface="Noto Sans CJK JP" pitchFamily="34" charset="-120"/>
               </a:rPr>
               <a:t>全社ROE（2024）</a:t>
             </a:r>
@@ -9973,9 +9973,9 @@
                 <a:solidFill>
                   <a:srgbClr val="1B2436"/>
                 </a:solidFill>
-                <a:latin typeface="Calibri" pitchFamily="34" charset="0"/>
-                <a:ea typeface="Calibri" pitchFamily="34" charset="-122"/>
-                <a:cs typeface="Calibri" pitchFamily="34" charset="-120"/>
+                <a:latin typeface="Noto Sans CJK JP" pitchFamily="34" charset="0"/>
+                <a:ea typeface="Noto Sans CJK JP" pitchFamily="34" charset="-122"/>
+                <a:cs typeface="Noto Sans CJK JP" pitchFamily="34" charset="-120"/>
               </a:rPr>
               <a:t>ROE 7.5%(2023) → 12.7%</a:t>
             </a:r>
@@ -9994,9 +9994,9 @@
                 <a:solidFill>
                   <a:srgbClr val="1B2436"/>
                 </a:solidFill>
-                <a:latin typeface="Calibri" pitchFamily="34" charset="0"/>
-                <a:ea typeface="Calibri" pitchFamily="34" charset="-122"/>
-                <a:cs typeface="Calibri" pitchFamily="34" charset="-120"/>
+                <a:latin typeface="Noto Sans CJK JP" pitchFamily="34" charset="0"/>
+                <a:ea typeface="Noto Sans CJK JP" pitchFamily="34" charset="-122"/>
+                <a:cs typeface="Noto Sans CJK JP" pitchFamily="34" charset="-120"/>
               </a:rPr>
               <a:t>純利益 $14.3B</a:t>
             </a:r>
@@ -10015,9 +10015,9 @@
                 <a:solidFill>
                   <a:srgbClr val="1B2436"/>
                 </a:solidFill>
-                <a:latin typeface="Calibri" pitchFamily="34" charset="0"/>
-                <a:ea typeface="Calibri" pitchFamily="34" charset="-122"/>
-                <a:cs typeface="Calibri" pitchFamily="34" charset="-120"/>
+                <a:latin typeface="Noto Sans CJK JP" pitchFamily="34" charset="0"/>
+                <a:ea typeface="Noto Sans CJK JP" pitchFamily="34" charset="-122"/>
+                <a:cs typeface="Noto Sans CJK JP" pitchFamily="34" charset="-120"/>
               </a:rPr>
               <a:t>EPS $40.54（+77%）</a:t>
             </a:r>
@@ -10106,9 +10106,9 @@
                 <a:solidFill>
                   <a:srgbClr val="0A1A3F"/>
                 </a:solidFill>
-                <a:latin typeface="Georgia" pitchFamily="34" charset="0"/>
-                <a:ea typeface="Georgia" pitchFamily="34" charset="-122"/>
-                <a:cs typeface="Georgia" pitchFamily="34" charset="-120"/>
+                <a:latin typeface="Noto Sans CJK JP" pitchFamily="34" charset="0"/>
+                <a:ea typeface="Noto Sans CJK JP" pitchFamily="34" charset="-122"/>
+                <a:cs typeface="Noto Sans CJK JP" pitchFamily="34" charset="-120"/>
               </a:rPr>
               <a:t>② 戦略の核心</a:t>
             </a:r>
@@ -10169,9 +10169,9 @@
                 <a:solidFill>
                   <a:srgbClr val="0A1A3F"/>
                 </a:solidFill>
-                <a:latin typeface="Georgia" pitchFamily="34" charset="0"/>
-                <a:ea typeface="Georgia" pitchFamily="34" charset="-122"/>
-                <a:cs typeface="Georgia" pitchFamily="34" charset="-120"/>
+                <a:latin typeface="Noto Sans CJK JP" pitchFamily="34" charset="0"/>
+                <a:ea typeface="Noto Sans CJK JP" pitchFamily="34" charset="-122"/>
+                <a:cs typeface="Noto Sans CJK JP" pitchFamily="34" charset="-120"/>
               </a:rPr>
               <a:t>安定収益へ</a:t>
             </a:r>
@@ -10208,9 +10208,9 @@
                 <a:solidFill>
                   <a:srgbClr val="C9A227"/>
                 </a:solidFill>
-                <a:latin typeface="Calibri" pitchFamily="34" charset="0"/>
-                <a:ea typeface="Calibri" pitchFamily="34" charset="-122"/>
-                <a:cs typeface="Calibri" pitchFamily="34" charset="-120"/>
+                <a:latin typeface="Noto Sans CJK JP" pitchFamily="34" charset="0"/>
+                <a:ea typeface="Noto Sans CJK JP" pitchFamily="34" charset="-122"/>
+                <a:cs typeface="Noto Sans CJK JP" pitchFamily="34" charset="-120"/>
               </a:rPr>
               <a:t>durable revenues</a:t>
             </a:r>
@@ -10251,9 +10251,9 @@
                 <a:solidFill>
                   <a:srgbClr val="1B2436"/>
                 </a:solidFill>
-                <a:latin typeface="Calibri" pitchFamily="34" charset="0"/>
-                <a:ea typeface="Calibri" pitchFamily="34" charset="-122"/>
-                <a:cs typeface="Calibri" pitchFamily="34" charset="-120"/>
+                <a:latin typeface="Noto Sans CJK JP" pitchFamily="34" charset="0"/>
+                <a:ea typeface="Noto Sans CJK JP" pitchFamily="34" charset="-122"/>
+                <a:cs typeface="Noto Sans CJK JP" pitchFamily="34" charset="-120"/>
               </a:rPr>
               <a:t>ブレやすい 自己投資／仲介 から</a:t>
             </a:r>
@@ -10272,9 +10272,9 @@
                 <a:solidFill>
                   <a:srgbClr val="1B2436"/>
                 </a:solidFill>
-                <a:latin typeface="Calibri" pitchFamily="34" charset="0"/>
-                <a:ea typeface="Calibri" pitchFamily="34" charset="-122"/>
-                <a:cs typeface="Calibri" pitchFamily="34" charset="-120"/>
+                <a:latin typeface="Noto Sans CJK JP" pitchFamily="34" charset="0"/>
+                <a:ea typeface="Noto Sans CJK JP" pitchFamily="34" charset="-122"/>
+                <a:cs typeface="Noto Sans CJK JP" pitchFamily="34" charset="-120"/>
               </a:rPr>
               <a:t>安定した 運用フィー／ファイナンシング へ</a:t>
             </a:r>
@@ -10293,9 +10293,9 @@
                 <a:solidFill>
                   <a:srgbClr val="1B2436"/>
                 </a:solidFill>
-                <a:latin typeface="Calibri" pitchFamily="34" charset="0"/>
-                <a:ea typeface="Calibri" pitchFamily="34" charset="-122"/>
-                <a:cs typeface="Calibri" pitchFamily="34" charset="-120"/>
+                <a:latin typeface="Noto Sans CJK JP" pitchFamily="34" charset="0"/>
+                <a:ea typeface="Noto Sans CJK JP" pitchFamily="34" charset="-122"/>
+                <a:cs typeface="Noto Sans CJK JP" pitchFamily="34" charset="-120"/>
               </a:rPr>
               <a:t>全社を貫く一本の戦略</a:t>
             </a:r>
@@ -10384,9 +10384,9 @@
                 <a:solidFill>
                   <a:srgbClr val="FFFFFF"/>
                 </a:solidFill>
-                <a:latin typeface="Georgia" pitchFamily="34" charset="0"/>
-                <a:ea typeface="Georgia" pitchFamily="34" charset="-122"/>
-                <a:cs typeface="Georgia" pitchFamily="34" charset="-120"/>
+                <a:latin typeface="Noto Sans CJK JP" pitchFamily="34" charset="0"/>
+                <a:ea typeface="Noto Sans CJK JP" pitchFamily="34" charset="-122"/>
+                <a:cs typeface="Noto Sans CJK JP" pitchFamily="34" charset="-120"/>
               </a:rPr>
               <a:t>③ 2部門の位置づけ</a:t>
             </a:r>
@@ -10448,9 +10448,9 @@
                 <a:solidFill>
                   <a:srgbClr val="0A1A3F"/>
                 </a:solidFill>
-                <a:latin typeface="Georgia" pitchFamily="34" charset="0"/>
-                <a:ea typeface="Georgia" pitchFamily="34" charset="-122"/>
-                <a:cs typeface="Georgia" pitchFamily="34" charset="-120"/>
+                <a:latin typeface="Noto Sans CJK JP" pitchFamily="34" charset="0"/>
+                <a:ea typeface="Noto Sans CJK JP" pitchFamily="34" charset="-122"/>
+                <a:cs typeface="Noto Sans CJK JP" pitchFamily="34" charset="-120"/>
               </a:rPr>
               <a:t>アセマネ部門</a:t>
             </a:r>
@@ -10487,9 +10487,9 @@
                 <a:solidFill>
                   <a:srgbClr val="1B2436"/>
                 </a:solidFill>
-                <a:latin typeface="Calibri" pitchFamily="34" charset="0"/>
-                <a:ea typeface="Calibri" pitchFamily="34" charset="-122"/>
-                <a:cs typeface="Calibri" pitchFamily="34" charset="-120"/>
+                <a:latin typeface="Noto Sans CJK JP" pitchFamily="34" charset="0"/>
+                <a:ea typeface="Noto Sans CJK JP" pitchFamily="34" charset="-122"/>
+                <a:cs typeface="Noto Sans CJK JP" pitchFamily="34" charset="-120"/>
               </a:rPr>
               <a:t>運用フィー（手数料）の柱</a:t>
             </a:r>
@@ -10551,9 +10551,9 @@
                 <a:solidFill>
                   <a:srgbClr val="0A1A3F"/>
                 </a:solidFill>
-                <a:latin typeface="Georgia" pitchFamily="34" charset="0"/>
-                <a:ea typeface="Georgia" pitchFamily="34" charset="-122"/>
-                <a:cs typeface="Georgia" pitchFamily="34" charset="-120"/>
+                <a:latin typeface="Noto Sans CJK JP" pitchFamily="34" charset="0"/>
+                <a:ea typeface="Noto Sans CJK JP" pitchFamily="34" charset="-122"/>
+                <a:cs typeface="Noto Sans CJK JP" pitchFamily="34" charset="-120"/>
               </a:rPr>
               <a:t>営業部門</a:t>
             </a:r>
@@ -10590,9 +10590,9 @@
                 <a:solidFill>
                   <a:srgbClr val="1B2436"/>
                 </a:solidFill>
-                <a:latin typeface="Calibri" pitchFamily="34" charset="0"/>
-                <a:ea typeface="Calibri" pitchFamily="34" charset="-122"/>
-                <a:cs typeface="Calibri" pitchFamily="34" charset="-120"/>
+                <a:latin typeface="Noto Sans CJK JP" pitchFamily="34" charset="0"/>
+                <a:ea typeface="Noto Sans CJK JP" pitchFamily="34" charset="-122"/>
+                <a:cs typeface="Noto Sans CJK JP" pitchFamily="34" charset="-120"/>
               </a:rPr>
               <a:t>マーケットメイク＋ファイナンシングの柱</a:t>
             </a:r>
@@ -10629,9 +10629,9 @@
                 <a:solidFill>
                   <a:srgbClr val="5A6678"/>
                 </a:solidFill>
-                <a:latin typeface="Calibri" pitchFamily="34" charset="0"/>
-                <a:ea typeface="Calibri" pitchFamily="34" charset="-122"/>
-                <a:cs typeface="Calibri" pitchFamily="34" charset="-120"/>
+                <a:latin typeface="Noto Sans CJK JP" pitchFamily="34" charset="0"/>
+                <a:ea typeface="Noto Sans CJK JP" pitchFamily="34" charset="-122"/>
+                <a:cs typeface="Noto Sans CJK JP" pitchFamily="34" charset="-120"/>
               </a:rPr>
               <a:t>02</a:t>
             </a:r>
@@ -10700,9 +10700,9 @@
                 <a:solidFill>
                   <a:srgbClr val="C9A227"/>
                 </a:solidFill>
-                <a:latin typeface="Calibri" pitchFamily="34" charset="0"/>
-                <a:ea typeface="Calibri" pitchFamily="34" charset="-122"/>
-                <a:cs typeface="Calibri" pitchFamily="34" charset="-120"/>
+                <a:latin typeface="Noto Sans CJK JP" pitchFamily="34" charset="0"/>
+                <a:ea typeface="Noto Sans CJK JP" pitchFamily="34" charset="-122"/>
+                <a:cs typeface="Noto Sans CJK JP" pitchFamily="34" charset="-120"/>
               </a:rPr>
               <a:t>COMPANY PROFILE</a:t>
             </a:r>
@@ -10739,9 +10739,9 @@
                 <a:solidFill>
                   <a:srgbClr val="0A1A3F"/>
                 </a:solidFill>
-                <a:latin typeface="Georgia" pitchFamily="34" charset="0"/>
-                <a:ea typeface="Georgia" pitchFamily="34" charset="-122"/>
-                <a:cs typeface="Georgia" pitchFamily="34" charset="-120"/>
+                <a:latin typeface="Noto Sans CJK JP" pitchFamily="34" charset="0"/>
+                <a:ea typeface="Noto Sans CJK JP" pitchFamily="34" charset="-122"/>
+                <a:cs typeface="Noto Sans CJK JP" pitchFamily="34" charset="-120"/>
               </a:rPr>
               <a:t>会社の輪郭 — 155年の歴史と現体制</a:t>
             </a:r>
@@ -10798,9 +10798,9 @@
                 <a:solidFill>
                   <a:srgbClr val="0A1A3F"/>
                 </a:solidFill>
-                <a:latin typeface="Georgia" pitchFamily="34" charset="0"/>
-                <a:ea typeface="Georgia" pitchFamily="34" charset="-122"/>
-                <a:cs typeface="Georgia" pitchFamily="34" charset="-120"/>
+                <a:latin typeface="Noto Sans CJK JP" pitchFamily="34" charset="0"/>
+                <a:ea typeface="Noto Sans CJK JP" pitchFamily="34" charset="-122"/>
+                <a:cs typeface="Noto Sans CJK JP" pitchFamily="34" charset="-120"/>
               </a:rPr>
               <a:t>沿革</a:t>
             </a:r>
@@ -10885,9 +10885,9 @@
                 <a:solidFill>
                   <a:srgbClr val="0A1A3F"/>
                 </a:solidFill>
-                <a:latin typeface="Georgia" pitchFamily="34" charset="0"/>
-                <a:ea typeface="Georgia" pitchFamily="34" charset="-122"/>
-                <a:cs typeface="Georgia" pitchFamily="34" charset="-120"/>
+                <a:latin typeface="Noto Sans CJK JP" pitchFamily="34" charset="0"/>
+                <a:ea typeface="Noto Sans CJK JP" pitchFamily="34" charset="-122"/>
+                <a:cs typeface="Noto Sans CJK JP" pitchFamily="34" charset="-120"/>
               </a:rPr>
               <a:t>1869</a:t>
             </a:r>
@@ -10924,9 +10924,9 @@
                 <a:solidFill>
                   <a:srgbClr val="1B2436"/>
                 </a:solidFill>
-                <a:latin typeface="Calibri" pitchFamily="34" charset="0"/>
-                <a:ea typeface="Calibri" pitchFamily="34" charset="-122"/>
-                <a:cs typeface="Calibri" pitchFamily="34" charset="-120"/>
+                <a:latin typeface="Noto Sans CJK JP" pitchFamily="34" charset="0"/>
+                <a:ea typeface="Noto Sans CJK JP" pitchFamily="34" charset="-122"/>
+                <a:cs typeface="Noto Sans CJK JP" pitchFamily="34" charset="-120"/>
               </a:rPr>
               <a:t>創業（ニューヨーク）</a:t>
             </a:r>
@@ -10988,9 +10988,9 @@
                 <a:solidFill>
                   <a:srgbClr val="0A1A3F"/>
                 </a:solidFill>
-                <a:latin typeface="Georgia" pitchFamily="34" charset="0"/>
-                <a:ea typeface="Georgia" pitchFamily="34" charset="-122"/>
-                <a:cs typeface="Georgia" pitchFamily="34" charset="-120"/>
+                <a:latin typeface="Noto Sans CJK JP" pitchFamily="34" charset="0"/>
+                <a:ea typeface="Noto Sans CJK JP" pitchFamily="34" charset="-122"/>
+                <a:cs typeface="Noto Sans CJK JP" pitchFamily="34" charset="-120"/>
               </a:rPr>
               <a:t>1999</a:t>
             </a:r>
@@ -11027,9 +11027,9 @@
                 <a:solidFill>
                   <a:srgbClr val="1B2436"/>
                 </a:solidFill>
-                <a:latin typeface="Calibri" pitchFamily="34" charset="0"/>
-                <a:ea typeface="Calibri" pitchFamily="34" charset="-122"/>
-                <a:cs typeface="Calibri" pitchFamily="34" charset="-120"/>
+                <a:latin typeface="Noto Sans CJK JP" pitchFamily="34" charset="0"/>
+                <a:ea typeface="Noto Sans CJK JP" pitchFamily="34" charset="-122"/>
+                <a:cs typeface="Noto Sans CJK JP" pitchFamily="34" charset="-120"/>
               </a:rPr>
               <a:t>NYSE上場</a:t>
             </a:r>
@@ -11091,9 +11091,9 @@
                 <a:solidFill>
                   <a:srgbClr val="0A1A3F"/>
                 </a:solidFill>
-                <a:latin typeface="Georgia" pitchFamily="34" charset="0"/>
-                <a:ea typeface="Georgia" pitchFamily="34" charset="-122"/>
-                <a:cs typeface="Georgia" pitchFamily="34" charset="-120"/>
+                <a:latin typeface="Noto Sans CJK JP" pitchFamily="34" charset="0"/>
+                <a:ea typeface="Noto Sans CJK JP" pitchFamily="34" charset="-122"/>
+                <a:cs typeface="Noto Sans CJK JP" pitchFamily="34" charset="-120"/>
               </a:rPr>
               <a:t>2008</a:t>
             </a:r>
@@ -11130,9 +11130,9 @@
                 <a:solidFill>
                   <a:srgbClr val="1B2436"/>
                 </a:solidFill>
-                <a:latin typeface="Calibri" pitchFamily="34" charset="0"/>
-                <a:ea typeface="Calibri" pitchFamily="34" charset="-122"/>
-                <a:cs typeface="Calibri" pitchFamily="34" charset="-120"/>
+                <a:latin typeface="Noto Sans CJK JP" pitchFamily="34" charset="0"/>
+                <a:ea typeface="Noto Sans CJK JP" pitchFamily="34" charset="-122"/>
+                <a:cs typeface="Noto Sans CJK JP" pitchFamily="34" charset="-120"/>
               </a:rPr>
               <a:t>銀行持株会社化</a:t>
             </a:r>
@@ -11194,9 +11194,9 @@
                 <a:solidFill>
                   <a:srgbClr val="0A1A3F"/>
                 </a:solidFill>
-                <a:latin typeface="Georgia" pitchFamily="34" charset="0"/>
-                <a:ea typeface="Georgia" pitchFamily="34" charset="-122"/>
-                <a:cs typeface="Georgia" pitchFamily="34" charset="-120"/>
+                <a:latin typeface="Noto Sans CJK JP" pitchFamily="34" charset="0"/>
+                <a:ea typeface="Noto Sans CJK JP" pitchFamily="34" charset="-122"/>
+                <a:cs typeface="Noto Sans CJK JP" pitchFamily="34" charset="-120"/>
               </a:rPr>
               <a:t>2022</a:t>
             </a:r>
@@ -11233,9 +11233,9 @@
                 <a:solidFill>
                   <a:srgbClr val="1B2436"/>
                 </a:solidFill>
-                <a:latin typeface="Calibri" pitchFamily="34" charset="0"/>
-                <a:ea typeface="Calibri" pitchFamily="34" charset="-122"/>
-                <a:cs typeface="Calibri" pitchFamily="34" charset="-120"/>
+                <a:latin typeface="Noto Sans CJK JP" pitchFamily="34" charset="0"/>
+                <a:ea typeface="Noto Sans CJK JP" pitchFamily="34" charset="-122"/>
+                <a:cs typeface="Noto Sans CJK JP" pitchFamily="34" charset="-120"/>
               </a:rPr>
               <a:t>3セグメント体制へ再編</a:t>
             </a:r>
@@ -11272,9 +11272,9 @@
                 <a:solidFill>
                   <a:srgbClr val="0A1A3F"/>
                 </a:solidFill>
-                <a:latin typeface="Georgia" pitchFamily="34" charset="0"/>
-                <a:ea typeface="Georgia" pitchFamily="34" charset="-122"/>
-                <a:cs typeface="Georgia" pitchFamily="34" charset="-120"/>
+                <a:latin typeface="Noto Sans CJK JP" pitchFamily="34" charset="0"/>
+                <a:ea typeface="Noto Sans CJK JP" pitchFamily="34" charset="-122"/>
+                <a:cs typeface="Noto Sans CJK JP" pitchFamily="34" charset="-120"/>
               </a:rPr>
               <a:t>現経営体制</a:t>
             </a:r>
@@ -11387,9 +11387,9 @@
                 <a:solidFill>
                   <a:srgbClr val="0A1A3F"/>
                 </a:solidFill>
-                <a:latin typeface="Georgia" pitchFamily="34" charset="0"/>
-                <a:ea typeface="Georgia" pitchFamily="34" charset="-122"/>
-                <a:cs typeface="Georgia" pitchFamily="34" charset="-120"/>
+                <a:latin typeface="Noto Sans CJK JP" pitchFamily="34" charset="0"/>
+                <a:ea typeface="Noto Sans CJK JP" pitchFamily="34" charset="-122"/>
+                <a:cs typeface="Noto Sans CJK JP" pitchFamily="34" charset="-120"/>
               </a:rPr>
               <a:t>David Solomon</a:t>
             </a:r>
@@ -11426,9 +11426,9 @@
                 <a:solidFill>
                   <a:srgbClr val="C9A227"/>
                 </a:solidFill>
-                <a:latin typeface="Calibri" pitchFamily="34" charset="0"/>
-                <a:ea typeface="Calibri" pitchFamily="34" charset="-122"/>
-                <a:cs typeface="Calibri" pitchFamily="34" charset="-120"/>
+                <a:latin typeface="Noto Sans CJK JP" pitchFamily="34" charset="0"/>
+                <a:ea typeface="Noto Sans CJK JP" pitchFamily="34" charset="-122"/>
+                <a:cs typeface="Noto Sans CJK JP" pitchFamily="34" charset="-120"/>
               </a:rPr>
               <a:t>会長 兼 CEO</a:t>
             </a:r>
@@ -11541,9 +11541,9 @@
                 <a:solidFill>
                   <a:srgbClr val="0A1A3F"/>
                 </a:solidFill>
-                <a:latin typeface="Georgia" pitchFamily="34" charset="0"/>
-                <a:ea typeface="Georgia" pitchFamily="34" charset="-122"/>
-                <a:cs typeface="Georgia" pitchFamily="34" charset="-120"/>
+                <a:latin typeface="Noto Sans CJK JP" pitchFamily="34" charset="0"/>
+                <a:ea typeface="Noto Sans CJK JP" pitchFamily="34" charset="-122"/>
+                <a:cs typeface="Noto Sans CJK JP" pitchFamily="34" charset="-120"/>
               </a:rPr>
               <a:t>John Waldron</a:t>
             </a:r>
@@ -11580,9 +11580,9 @@
                 <a:solidFill>
                   <a:srgbClr val="C9A227"/>
                 </a:solidFill>
-                <a:latin typeface="Calibri" pitchFamily="34" charset="0"/>
-                <a:ea typeface="Calibri" pitchFamily="34" charset="-122"/>
-                <a:cs typeface="Calibri" pitchFamily="34" charset="-120"/>
+                <a:latin typeface="Noto Sans CJK JP" pitchFamily="34" charset="0"/>
+                <a:ea typeface="Noto Sans CJK JP" pitchFamily="34" charset="-122"/>
+                <a:cs typeface="Noto Sans CJK JP" pitchFamily="34" charset="-120"/>
               </a:rPr>
               <a:t>社長 兼 COO</a:t>
             </a:r>
@@ -11695,9 +11695,9 @@
                 <a:solidFill>
                   <a:srgbClr val="0A1A3F"/>
                 </a:solidFill>
-                <a:latin typeface="Georgia" pitchFamily="34" charset="0"/>
-                <a:ea typeface="Georgia" pitchFamily="34" charset="-122"/>
-                <a:cs typeface="Georgia" pitchFamily="34" charset="-120"/>
+                <a:latin typeface="Noto Sans CJK JP" pitchFamily="34" charset="0"/>
+                <a:ea typeface="Noto Sans CJK JP" pitchFamily="34" charset="-122"/>
+                <a:cs typeface="Noto Sans CJK JP" pitchFamily="34" charset="-120"/>
               </a:rPr>
               <a:t>Denis Coleman</a:t>
             </a:r>
@@ -11734,9 +11734,9 @@
                 <a:solidFill>
                   <a:srgbClr val="C9A227"/>
                 </a:solidFill>
-                <a:latin typeface="Calibri" pitchFamily="34" charset="0"/>
-                <a:ea typeface="Calibri" pitchFamily="34" charset="-122"/>
-                <a:cs typeface="Calibri" pitchFamily="34" charset="-120"/>
+                <a:latin typeface="Noto Sans CJK JP" pitchFamily="34" charset="0"/>
+                <a:ea typeface="Noto Sans CJK JP" pitchFamily="34" charset="-122"/>
+                <a:cs typeface="Noto Sans CJK JP" pitchFamily="34" charset="-120"/>
               </a:rPr>
               <a:t>CFO</a:t>
             </a:r>
@@ -11793,9 +11793,9 @@
                 <a:solidFill>
                   <a:srgbClr val="E8B84B"/>
                 </a:solidFill>
-                <a:latin typeface="Calibri" pitchFamily="34" charset="0"/>
-                <a:ea typeface="Calibri" pitchFamily="34" charset="-122"/>
-                <a:cs typeface="Calibri" pitchFamily="34" charset="-120"/>
+                <a:latin typeface="Noto Sans CJK JP" pitchFamily="34" charset="0"/>
+                <a:ea typeface="Noto Sans CJK JP" pitchFamily="34" charset="-122"/>
+                <a:cs typeface="Noto Sans CJK JP" pitchFamily="34" charset="-120"/>
               </a:rPr>
               <a:t>本社  </a:t>
             </a:r>
@@ -11807,9 +11807,9 @@
                 <a:solidFill>
                   <a:srgbClr val="FFFFFF"/>
                 </a:solidFill>
-                <a:latin typeface="Calibri" pitchFamily="34" charset="0"/>
-                <a:ea typeface="Calibri" pitchFamily="34" charset="-122"/>
-                <a:cs typeface="Calibri" pitchFamily="34" charset="-120"/>
+                <a:latin typeface="Noto Sans CJK JP" pitchFamily="34" charset="0"/>
+                <a:ea typeface="Noto Sans CJK JP" pitchFamily="34" charset="-122"/>
+                <a:cs typeface="Noto Sans CJK JP" pitchFamily="34" charset="-120"/>
               </a:rPr>
               <a:t>ニューヨーク      </a:t>
             </a:r>
@@ -11821,9 +11821,9 @@
                 <a:solidFill>
                   <a:srgbClr val="E8B84B"/>
                 </a:solidFill>
-                <a:latin typeface="Calibri" pitchFamily="34" charset="0"/>
-                <a:ea typeface="Calibri" pitchFamily="34" charset="-122"/>
-                <a:cs typeface="Calibri" pitchFamily="34" charset="-120"/>
+                <a:latin typeface="Noto Sans CJK JP" pitchFamily="34" charset="0"/>
+                <a:ea typeface="Noto Sans CJK JP" pitchFamily="34" charset="-122"/>
+                <a:cs typeface="Noto Sans CJK JP" pitchFamily="34" charset="-120"/>
               </a:rPr>
               <a:t>従業員  </a:t>
             </a:r>
@@ -11835,9 +11835,9 @@
                 <a:solidFill>
                   <a:srgbClr val="FFFFFF"/>
                 </a:solidFill>
-                <a:latin typeface="Calibri" pitchFamily="34" charset="0"/>
-                <a:ea typeface="Calibri" pitchFamily="34" charset="-122"/>
-                <a:cs typeface="Calibri" pitchFamily="34" charset="-120"/>
+                <a:latin typeface="Noto Sans CJK JP" pitchFamily="34" charset="0"/>
+                <a:ea typeface="Noto Sans CJK JP" pitchFamily="34" charset="-122"/>
+                <a:cs typeface="Noto Sans CJK JP" pitchFamily="34" charset="-120"/>
               </a:rPr>
               <a:t>約 46,500人（2024年末）</a:t>
             </a:r>
@@ -11874,9 +11874,9 @@
                 <a:solidFill>
                   <a:srgbClr val="5A6678"/>
                 </a:solidFill>
-                <a:latin typeface="Calibri" pitchFamily="34" charset="0"/>
-                <a:ea typeface="Calibri" pitchFamily="34" charset="-122"/>
-                <a:cs typeface="Calibri" pitchFamily="34" charset="-120"/>
+                <a:latin typeface="Noto Sans CJK JP" pitchFamily="34" charset="0"/>
+                <a:ea typeface="Noto Sans CJK JP" pitchFamily="34" charset="-122"/>
+                <a:cs typeface="Noto Sans CJK JP" pitchFamily="34" charset="-120"/>
               </a:rPr>
               <a:t>03</a:t>
             </a:r>
@@ -11945,9 +11945,9 @@
                 <a:solidFill>
                   <a:srgbClr val="C9A227"/>
                 </a:solidFill>
-                <a:latin typeface="Calibri" pitchFamily="34" charset="0"/>
-                <a:ea typeface="Calibri" pitchFamily="34" charset="-122"/>
-                <a:cs typeface="Calibri" pitchFamily="34" charset="-120"/>
+                <a:latin typeface="Noto Sans CJK JP" pitchFamily="34" charset="0"/>
+                <a:ea typeface="Noto Sans CJK JP" pitchFamily="34" charset="-122"/>
+                <a:cs typeface="Noto Sans CJK JP" pitchFamily="34" charset="-120"/>
               </a:rPr>
               <a:t>BUSINESS SEGMENTS</a:t>
             </a:r>
@@ -11984,9 +11984,9 @@
                 <a:solidFill>
                   <a:srgbClr val="0A1A3F"/>
                 </a:solidFill>
-                <a:latin typeface="Georgia" pitchFamily="34" charset="0"/>
-                <a:ea typeface="Georgia" pitchFamily="34" charset="-122"/>
-                <a:cs typeface="Georgia" pitchFamily="34" charset="-120"/>
+                <a:latin typeface="Noto Sans CJK JP" pitchFamily="34" charset="0"/>
+                <a:ea typeface="Noto Sans CJK JP" pitchFamily="34" charset="-122"/>
+                <a:cs typeface="Noto Sans CJK JP" pitchFamily="34" charset="-120"/>
               </a:rPr>
               <a:t>3つの事業セグメント</a:t>
             </a:r>
@@ -12139,9 +12139,9 @@
                 <a:solidFill>
                   <a:srgbClr val="0A1A3F"/>
                 </a:solidFill>
-                <a:latin typeface="Georgia" pitchFamily="34" charset="0"/>
-                <a:ea typeface="Georgia" pitchFamily="34" charset="-122"/>
-                <a:cs typeface="Georgia" pitchFamily="34" charset="-120"/>
+                <a:latin typeface="Noto Sans CJK JP" pitchFamily="34" charset="0"/>
+                <a:ea typeface="Noto Sans CJK JP" pitchFamily="34" charset="-122"/>
+                <a:cs typeface="Noto Sans CJK JP" pitchFamily="34" charset="-120"/>
               </a:rPr>
               <a:t>Global Banking</a:t>
             </a:r>
@@ -12156,9 +12156,9 @@
                 <a:solidFill>
                   <a:srgbClr val="0A1A3F"/>
                 </a:solidFill>
-                <a:latin typeface="Georgia" pitchFamily="34" charset="0"/>
-                <a:ea typeface="Georgia" pitchFamily="34" charset="-122"/>
-                <a:cs typeface="Georgia" pitchFamily="34" charset="-120"/>
+                <a:latin typeface="Noto Sans CJK JP" pitchFamily="34" charset="0"/>
+                <a:ea typeface="Noto Sans CJK JP" pitchFamily="34" charset="-122"/>
+                <a:cs typeface="Noto Sans CJK JP" pitchFamily="34" charset="-120"/>
               </a:rPr>
               <a:t>&amp; Markets</a:t>
             </a:r>
@@ -12195,9 +12195,9 @@
                 <a:solidFill>
                   <a:srgbClr val="5A6678"/>
                 </a:solidFill>
-                <a:latin typeface="Calibri" pitchFamily="34" charset="0"/>
-                <a:ea typeface="Calibri" pitchFamily="34" charset="-122"/>
-                <a:cs typeface="Calibri" pitchFamily="34" charset="-120"/>
+                <a:latin typeface="Noto Sans CJK JP" pitchFamily="34" charset="0"/>
+                <a:ea typeface="Noto Sans CJK JP" pitchFamily="34" charset="-122"/>
+                <a:cs typeface="Noto Sans CJK JP" pitchFamily="34" charset="-120"/>
               </a:rPr>
               <a:t>投資銀行 ＋ FICC ＋ Equities</a:t>
             </a:r>
@@ -12234,9 +12234,9 @@
                 <a:solidFill>
                   <a:srgbClr val="0A1A3F"/>
                 </a:solidFill>
-                <a:latin typeface="Georgia" pitchFamily="34" charset="0"/>
-                <a:ea typeface="Georgia" pitchFamily="34" charset="-122"/>
-                <a:cs typeface="Georgia" pitchFamily="34" charset="-120"/>
+                <a:latin typeface="Noto Sans CJK JP" pitchFamily="34" charset="0"/>
+                <a:ea typeface="Noto Sans CJK JP" pitchFamily="34" charset="-122"/>
+                <a:cs typeface="Noto Sans CJK JP" pitchFamily="34" charset="-120"/>
               </a:rPr>
               <a:t>$34.94B</a:t>
             </a:r>
@@ -12295,9 +12295,9 @@
                 <a:solidFill>
                   <a:srgbClr val="0A1A3F"/>
                 </a:solidFill>
-                <a:latin typeface="Calibri" pitchFamily="34" charset="0"/>
-                <a:ea typeface="Calibri" pitchFamily="34" charset="-122"/>
-                <a:cs typeface="Calibri" pitchFamily="34" charset="-120"/>
+                <a:latin typeface="Noto Sans CJK JP" pitchFamily="34" charset="0"/>
+                <a:ea typeface="Noto Sans CJK JP" pitchFamily="34" charset="-122"/>
+                <a:cs typeface="Noto Sans CJK JP" pitchFamily="34" charset="-120"/>
               </a:rPr>
               <a:t>営業部門はここ</a:t>
             </a:r>
@@ -12430,9 +12430,9 @@
                 <a:solidFill>
                   <a:srgbClr val="0A1A3F"/>
                 </a:solidFill>
-                <a:latin typeface="Georgia" pitchFamily="34" charset="0"/>
-                <a:ea typeface="Georgia" pitchFamily="34" charset="-122"/>
-                <a:cs typeface="Georgia" pitchFamily="34" charset="-120"/>
+                <a:latin typeface="Noto Sans CJK JP" pitchFamily="34" charset="0"/>
+                <a:ea typeface="Noto Sans CJK JP" pitchFamily="34" charset="-122"/>
+                <a:cs typeface="Noto Sans CJK JP" pitchFamily="34" charset="-120"/>
               </a:rPr>
               <a:t>Asset &amp; Wealth</a:t>
             </a:r>
@@ -12447,9 +12447,9 @@
                 <a:solidFill>
                   <a:srgbClr val="0A1A3F"/>
                 </a:solidFill>
-                <a:latin typeface="Georgia" pitchFamily="34" charset="0"/>
-                <a:ea typeface="Georgia" pitchFamily="34" charset="-122"/>
-                <a:cs typeface="Georgia" pitchFamily="34" charset="-120"/>
+                <a:latin typeface="Noto Sans CJK JP" pitchFamily="34" charset="0"/>
+                <a:ea typeface="Noto Sans CJK JP" pitchFamily="34" charset="-122"/>
+                <a:cs typeface="Noto Sans CJK JP" pitchFamily="34" charset="-120"/>
               </a:rPr>
               <a:t>Management</a:t>
             </a:r>
@@ -12486,9 +12486,9 @@
                 <a:solidFill>
                   <a:srgbClr val="5A6678"/>
                 </a:solidFill>
-                <a:latin typeface="Calibri" pitchFamily="34" charset="0"/>
-                <a:ea typeface="Calibri" pitchFamily="34" charset="-122"/>
-                <a:cs typeface="Calibri" pitchFamily="34" charset="-120"/>
+                <a:latin typeface="Noto Sans CJK JP" pitchFamily="34" charset="0"/>
+                <a:ea typeface="Noto Sans CJK JP" pitchFamily="34" charset="-122"/>
+                <a:cs typeface="Noto Sans CJK JP" pitchFamily="34" charset="-120"/>
               </a:rPr>
               <a:t>運用（GSAM）＋ ウェルス（PWM）</a:t>
             </a:r>
@@ -12525,9 +12525,9 @@
                 <a:solidFill>
                   <a:srgbClr val="0A1A3F"/>
                 </a:solidFill>
-                <a:latin typeface="Georgia" pitchFamily="34" charset="0"/>
-                <a:ea typeface="Georgia" pitchFamily="34" charset="-122"/>
-                <a:cs typeface="Georgia" pitchFamily="34" charset="-120"/>
+                <a:latin typeface="Noto Sans CJK JP" pitchFamily="34" charset="0"/>
+                <a:ea typeface="Noto Sans CJK JP" pitchFamily="34" charset="-122"/>
+                <a:cs typeface="Noto Sans CJK JP" pitchFamily="34" charset="-120"/>
               </a:rPr>
               <a:t>$16.14B</a:t>
             </a:r>
@@ -12586,9 +12586,9 @@
                 <a:solidFill>
                   <a:srgbClr val="0A1A3F"/>
                 </a:solidFill>
-                <a:latin typeface="Calibri" pitchFamily="34" charset="0"/>
-                <a:ea typeface="Calibri" pitchFamily="34" charset="-122"/>
-                <a:cs typeface="Calibri" pitchFamily="34" charset="-120"/>
+                <a:latin typeface="Noto Sans CJK JP" pitchFamily="34" charset="0"/>
+                <a:ea typeface="Noto Sans CJK JP" pitchFamily="34" charset="-122"/>
+                <a:cs typeface="Noto Sans CJK JP" pitchFamily="34" charset="-120"/>
               </a:rPr>
               <a:t>アセマネ部門はここ</a:t>
             </a:r>
@@ -12721,9 +12721,9 @@
                 <a:solidFill>
                   <a:srgbClr val="0A1A3F"/>
                 </a:solidFill>
-                <a:latin typeface="Georgia" pitchFamily="34" charset="0"/>
-                <a:ea typeface="Georgia" pitchFamily="34" charset="-122"/>
-                <a:cs typeface="Georgia" pitchFamily="34" charset="-120"/>
+                <a:latin typeface="Noto Sans CJK JP" pitchFamily="34" charset="0"/>
+                <a:ea typeface="Noto Sans CJK JP" pitchFamily="34" charset="-122"/>
+                <a:cs typeface="Noto Sans CJK JP" pitchFamily="34" charset="-120"/>
               </a:rPr>
               <a:t>Platform</a:t>
             </a:r>
@@ -12738,9 +12738,9 @@
                 <a:solidFill>
                   <a:srgbClr val="0A1A3F"/>
                 </a:solidFill>
-                <a:latin typeface="Georgia" pitchFamily="34" charset="0"/>
-                <a:ea typeface="Georgia" pitchFamily="34" charset="-122"/>
-                <a:cs typeface="Georgia" pitchFamily="34" charset="-120"/>
+                <a:latin typeface="Noto Sans CJK JP" pitchFamily="34" charset="0"/>
+                <a:ea typeface="Noto Sans CJK JP" pitchFamily="34" charset="-122"/>
+                <a:cs typeface="Noto Sans CJK JP" pitchFamily="34" charset="-120"/>
               </a:rPr>
               <a:t>Solutions</a:t>
             </a:r>
@@ -12777,9 +12777,9 @@
                 <a:solidFill>
                   <a:srgbClr val="5A6678"/>
                 </a:solidFill>
-                <a:latin typeface="Calibri" pitchFamily="34" charset="0"/>
-                <a:ea typeface="Calibri" pitchFamily="34" charset="-122"/>
-                <a:cs typeface="Calibri" pitchFamily="34" charset="-120"/>
+                <a:latin typeface="Noto Sans CJK JP" pitchFamily="34" charset="0"/>
+                <a:ea typeface="Noto Sans CJK JP" pitchFamily="34" charset="-122"/>
+                <a:cs typeface="Noto Sans CJK JP" pitchFamily="34" charset="-120"/>
               </a:rPr>
               <a:t>カード提携 等</a:t>
             </a:r>
@@ -12816,9 +12816,9 @@
                 <a:solidFill>
                   <a:srgbClr val="5A6678"/>
                 </a:solidFill>
-                <a:latin typeface="Georgia" pitchFamily="34" charset="0"/>
-                <a:ea typeface="Georgia" pitchFamily="34" charset="-122"/>
-                <a:cs typeface="Georgia" pitchFamily="34" charset="-120"/>
+                <a:latin typeface="Noto Sans CJK JP" pitchFamily="34" charset="0"/>
+                <a:ea typeface="Noto Sans CJK JP" pitchFamily="34" charset="-122"/>
+                <a:cs typeface="Noto Sans CJK JP" pitchFamily="34" charset="-120"/>
               </a:rPr>
               <a:t>約 $2.43B</a:t>
             </a:r>
@@ -12877,9 +12877,9 @@
                 <a:solidFill>
                   <a:srgbClr val="5A6678"/>
                 </a:solidFill>
-                <a:latin typeface="Calibri" pitchFamily="34" charset="0"/>
-                <a:ea typeface="Calibri" pitchFamily="34" charset="-122"/>
-                <a:cs typeface="Calibri" pitchFamily="34" charset="-120"/>
+                <a:latin typeface="Noto Sans CJK JP" pitchFamily="34" charset="0"/>
+                <a:ea typeface="Noto Sans CJK JP" pitchFamily="34" charset="-122"/>
+                <a:cs typeface="Noto Sans CJK JP" pitchFamily="34" charset="-120"/>
               </a:rPr>
               <a:t>縮小・黒字化途上</a:t>
             </a:r>
@@ -12916,9 +12916,9 @@
                 <a:solidFill>
                   <a:srgbClr val="5A6678"/>
                 </a:solidFill>
-                <a:latin typeface="Calibri" pitchFamily="34" charset="0"/>
-                <a:ea typeface="Calibri" pitchFamily="34" charset="-122"/>
-                <a:cs typeface="Calibri" pitchFamily="34" charset="-120"/>
+                <a:latin typeface="Noto Sans CJK JP" pitchFamily="34" charset="0"/>
+                <a:ea typeface="Noto Sans CJK JP" pitchFamily="34" charset="-122"/>
+                <a:cs typeface="Noto Sans CJK JP" pitchFamily="34" charset="-120"/>
               </a:rPr>
               <a:t>純収益はFY2024（通期）。本件で深掘りする2部門をゴールドで強調。</a:t>
             </a:r>
@@ -12955,9 +12955,9 @@
                 <a:solidFill>
                   <a:srgbClr val="5A6678"/>
                 </a:solidFill>
-                <a:latin typeface="Calibri" pitchFamily="34" charset="0"/>
-                <a:ea typeface="Calibri" pitchFamily="34" charset="-122"/>
-                <a:cs typeface="Calibri" pitchFamily="34" charset="-120"/>
+                <a:latin typeface="Noto Sans CJK JP" pitchFamily="34" charset="0"/>
+                <a:ea typeface="Noto Sans CJK JP" pitchFamily="34" charset="-122"/>
+                <a:cs typeface="Noto Sans CJK JP" pitchFamily="34" charset="-120"/>
               </a:rPr>
               <a:t>04</a:t>
             </a:r>
@@ -13026,9 +13026,9 @@
                 <a:solidFill>
                   <a:srgbClr val="C9A227"/>
                 </a:solidFill>
-                <a:latin typeface="Calibri" pitchFamily="34" charset="0"/>
-                <a:ea typeface="Calibri" pitchFamily="34" charset="-122"/>
-                <a:cs typeface="Calibri" pitchFamily="34" charset="-120"/>
+                <a:latin typeface="Noto Sans CJK JP" pitchFamily="34" charset="0"/>
+                <a:ea typeface="Noto Sans CJK JP" pitchFamily="34" charset="-122"/>
+                <a:cs typeface="Noto Sans CJK JP" pitchFamily="34" charset="-120"/>
               </a:rPr>
               <a:t>FY2024 RESULTS</a:t>
             </a:r>
@@ -13065,9 +13065,9 @@
                 <a:solidFill>
                   <a:srgbClr val="0A1A3F"/>
                 </a:solidFill>
-                <a:latin typeface="Georgia" pitchFamily="34" charset="0"/>
-                <a:ea typeface="Georgia" pitchFamily="34" charset="-122"/>
-                <a:cs typeface="Georgia" pitchFamily="34" charset="-120"/>
+                <a:latin typeface="Noto Sans CJK JP" pitchFamily="34" charset="0"/>
+                <a:ea typeface="Noto Sans CJK JP" pitchFamily="34" charset="-122"/>
+                <a:cs typeface="Noto Sans CJK JP" pitchFamily="34" charset="-120"/>
               </a:rPr>
               <a:t>全社業績：2024年はV字回復</a:t>
             </a:r>
@@ -13192,9 +13192,9 @@
                 <a:solidFill>
                   <a:srgbClr val="0A1A3F"/>
                 </a:solidFill>
-                <a:latin typeface="Georgia" pitchFamily="34" charset="0"/>
-                <a:ea typeface="Georgia" pitchFamily="34" charset="-122"/>
-                <a:cs typeface="Georgia" pitchFamily="34" charset="-120"/>
+                <a:latin typeface="Noto Sans CJK JP" pitchFamily="34" charset="0"/>
+                <a:ea typeface="Noto Sans CJK JP" pitchFamily="34" charset="-122"/>
+                <a:cs typeface="Noto Sans CJK JP" pitchFamily="34" charset="-120"/>
               </a:rPr>
               <a:t>7.5% → 12.7%</a:t>
             </a:r>
@@ -13231,9 +13231,9 @@
                 <a:solidFill>
                   <a:srgbClr val="1B2436"/>
                 </a:solidFill>
-                <a:latin typeface="Calibri" pitchFamily="34" charset="0"/>
-                <a:ea typeface="Calibri" pitchFamily="34" charset="-122"/>
-                <a:cs typeface="Calibri" pitchFamily="34" charset="-120"/>
+                <a:latin typeface="Noto Sans CJK JP" pitchFamily="34" charset="0"/>
+                <a:ea typeface="Noto Sans CJK JP" pitchFamily="34" charset="-122"/>
+                <a:cs typeface="Noto Sans CJK JP" pitchFamily="34" charset="-120"/>
               </a:rPr>
               <a:t>全社ROE</a:t>
             </a:r>
@@ -13270,9 +13270,9 @@
                 <a:solidFill>
                   <a:srgbClr val="5A6678"/>
                 </a:solidFill>
-                <a:latin typeface="Calibri" pitchFamily="34" charset="0"/>
-                <a:ea typeface="Calibri" pitchFamily="34" charset="-122"/>
-                <a:cs typeface="Calibri" pitchFamily="34" charset="-120"/>
+                <a:latin typeface="Noto Sans CJK JP" pitchFamily="34" charset="0"/>
+                <a:ea typeface="Noto Sans CJK JP" pitchFamily="34" charset="-122"/>
+                <a:cs typeface="Noto Sans CJK JP" pitchFamily="34" charset="-120"/>
               </a:rPr>
               <a:t>収益性が大幅改善</a:t>
             </a:r>
@@ -13361,9 +13361,9 @@
                 <a:solidFill>
                   <a:srgbClr val="0A1A3F"/>
                 </a:solidFill>
-                <a:latin typeface="Georgia" pitchFamily="34" charset="0"/>
-                <a:ea typeface="Georgia" pitchFamily="34" charset="-122"/>
-                <a:cs typeface="Georgia" pitchFamily="34" charset="-120"/>
+                <a:latin typeface="Noto Sans CJK JP" pitchFamily="34" charset="0"/>
+                <a:ea typeface="Noto Sans CJK JP" pitchFamily="34" charset="-122"/>
+                <a:cs typeface="Noto Sans CJK JP" pitchFamily="34" charset="-120"/>
               </a:rPr>
               <a:t>74.6% → 63.1%</a:t>
             </a:r>
@@ -13400,9 +13400,9 @@
                 <a:solidFill>
                   <a:srgbClr val="1B2436"/>
                 </a:solidFill>
-                <a:latin typeface="Calibri" pitchFamily="34" charset="0"/>
-                <a:ea typeface="Calibri" pitchFamily="34" charset="-122"/>
-                <a:cs typeface="Calibri" pitchFamily="34" charset="-120"/>
+                <a:latin typeface="Noto Sans CJK JP" pitchFamily="34" charset="0"/>
+                <a:ea typeface="Noto Sans CJK JP" pitchFamily="34" charset="-122"/>
+                <a:cs typeface="Noto Sans CJK JP" pitchFamily="34" charset="-120"/>
               </a:rPr>
               <a:t>効率比率（経費率）</a:t>
             </a:r>
@@ -13439,9 +13439,9 @@
                 <a:solidFill>
                   <a:srgbClr val="5A6678"/>
                 </a:solidFill>
-                <a:latin typeface="Calibri" pitchFamily="34" charset="0"/>
-                <a:ea typeface="Calibri" pitchFamily="34" charset="-122"/>
-                <a:cs typeface="Calibri" pitchFamily="34" charset="-120"/>
+                <a:latin typeface="Noto Sans CJK JP" pitchFamily="34" charset="0"/>
+                <a:ea typeface="Noto Sans CJK JP" pitchFamily="34" charset="-122"/>
+                <a:cs typeface="Noto Sans CJK JP" pitchFamily="34" charset="-120"/>
               </a:rPr>
               <a:t>経費規律で改善</a:t>
             </a:r>
@@ -13505,9 +13505,9 @@
                 <a:solidFill>
                   <a:srgbClr val="FFFFFF"/>
                 </a:solidFill>
-                <a:latin typeface="Calibri" pitchFamily="34" charset="0"/>
-                <a:ea typeface="Calibri" pitchFamily="34" charset="-122"/>
-                <a:cs typeface="Calibri" pitchFamily="34" charset="-120"/>
+                <a:latin typeface="Noto Sans CJK JP" pitchFamily="34" charset="0"/>
+                <a:ea typeface="Noto Sans CJK JP" pitchFamily="34" charset="-122"/>
+                <a:cs typeface="Noto Sans CJK JP" pitchFamily="34" charset="-120"/>
               </a:rPr>
               <a:t>市況回復 ＋ 経費規律で、収益性が改善。</a:t>
             </a:r>
@@ -13544,9 +13544,9 @@
                 <a:solidFill>
                   <a:srgbClr val="5A6678"/>
                 </a:solidFill>
-                <a:latin typeface="Calibri" pitchFamily="34" charset="0"/>
-                <a:ea typeface="Calibri" pitchFamily="34" charset="-122"/>
-                <a:cs typeface="Calibri" pitchFamily="34" charset="-120"/>
+                <a:latin typeface="Noto Sans CJK JP" pitchFamily="34" charset="0"/>
+                <a:ea typeface="Noto Sans CJK JP" pitchFamily="34" charset="-122"/>
+                <a:cs typeface="Noto Sans CJK JP" pitchFamily="34" charset="-120"/>
               </a:rPr>
               <a:t>05</a:t>
             </a:r>
@@ -13615,9 +13615,9 @@
                 <a:solidFill>
                   <a:srgbClr val="C9A227"/>
                 </a:solidFill>
-                <a:latin typeface="Calibri" pitchFamily="34" charset="0"/>
-                <a:ea typeface="Calibri" pitchFamily="34" charset="-122"/>
-                <a:cs typeface="Calibri" pitchFamily="34" charset="-120"/>
+                <a:latin typeface="Noto Sans CJK JP" pitchFamily="34" charset="0"/>
+                <a:ea typeface="Noto Sans CJK JP" pitchFamily="34" charset="-122"/>
+                <a:cs typeface="Noto Sans CJK JP" pitchFamily="34" charset="-120"/>
               </a:rPr>
               <a:t>DIVISION 1 — AWM</a:t>
             </a:r>
@@ -13654,9 +13654,9 @@
                 <a:solidFill>
                   <a:srgbClr val="0A1A3F"/>
                 </a:solidFill>
-                <a:latin typeface="Georgia" pitchFamily="34" charset="0"/>
-                <a:ea typeface="Georgia" pitchFamily="34" charset="-122"/>
-                <a:cs typeface="Georgia" pitchFamily="34" charset="-120"/>
+                <a:latin typeface="Noto Sans CJK JP" pitchFamily="34" charset="0"/>
+                <a:ea typeface="Noto Sans CJK JP" pitchFamily="34" charset="-122"/>
+                <a:cs typeface="Noto Sans CJK JP" pitchFamily="34" charset="-120"/>
               </a:rPr>
               <a:t>【部門①】アセット・マネジメント部門（AWM）とは</a:t>
             </a:r>
@@ -13758,9 +13758,9 @@
                 <a:solidFill>
                   <a:srgbClr val="0A1A3F"/>
                 </a:solidFill>
-                <a:latin typeface="Georgia" pitchFamily="34" charset="0"/>
-                <a:ea typeface="Georgia" pitchFamily="34" charset="-122"/>
-                <a:cs typeface="Georgia" pitchFamily="34" charset="-120"/>
+                <a:latin typeface="Noto Sans CJK JP" pitchFamily="34" charset="0"/>
+                <a:ea typeface="Noto Sans CJK JP" pitchFamily="34" charset="-122"/>
+                <a:cs typeface="Noto Sans CJK JP" pitchFamily="34" charset="-120"/>
               </a:rPr>
               <a:t>役割</a:t>
             </a:r>
@@ -13797,9 +13797,9 @@
                 <a:solidFill>
                   <a:srgbClr val="1B2436"/>
                 </a:solidFill>
-                <a:latin typeface="Calibri" pitchFamily="34" charset="0"/>
-                <a:ea typeface="Calibri" pitchFamily="34" charset="-122"/>
-                <a:cs typeface="Calibri" pitchFamily="34" charset="-120"/>
+                <a:latin typeface="Noto Sans CJK JP" pitchFamily="34" charset="0"/>
+                <a:ea typeface="Noto Sans CJK JP" pitchFamily="34" charset="-122"/>
+                <a:cs typeface="Noto Sans CJK JP" pitchFamily="34" charset="-120"/>
               </a:rPr>
               <a:t>機関投資家・富裕層の資産を運用し、フィー（手数料）を得る。</a:t>
             </a:r>
@@ -13840,9 +13840,9 @@
                 <a:solidFill>
                   <a:srgbClr val="1B2436"/>
                 </a:solidFill>
-                <a:latin typeface="Calibri" pitchFamily="34" charset="0"/>
-                <a:ea typeface="Calibri" pitchFamily="34" charset="-122"/>
-                <a:cs typeface="Calibri" pitchFamily="34" charset="-120"/>
+                <a:latin typeface="Noto Sans CJK JP" pitchFamily="34" charset="0"/>
+                <a:ea typeface="Noto Sans CJK JP" pitchFamily="34" charset="-122"/>
+                <a:cs typeface="Noto Sans CJK JP" pitchFamily="34" charset="-120"/>
               </a:rPr>
               <a:t>GSAM ＝ 運用</a:t>
             </a:r>
@@ -13861,9 +13861,9 @@
                 <a:solidFill>
                   <a:srgbClr val="1B2436"/>
                 </a:solidFill>
-                <a:latin typeface="Calibri" pitchFamily="34" charset="0"/>
-                <a:ea typeface="Calibri" pitchFamily="34" charset="-122"/>
-                <a:cs typeface="Calibri" pitchFamily="34" charset="-120"/>
+                <a:latin typeface="Noto Sans CJK JP" pitchFamily="34" charset="0"/>
+                <a:ea typeface="Noto Sans CJK JP" pitchFamily="34" charset="-122"/>
+                <a:cs typeface="Noto Sans CJK JP" pitchFamily="34" charset="-120"/>
               </a:rPr>
               <a:t>PWM ＝ 超富裕層向けウェルス</a:t>
             </a:r>
@@ -13927,9 +13927,9 @@
                 <a:solidFill>
                   <a:srgbClr val="E8B84B"/>
                 </a:solidFill>
-                <a:latin typeface="Calibri" pitchFamily="34" charset="0"/>
-                <a:ea typeface="Calibri" pitchFamily="34" charset="-122"/>
-                <a:cs typeface="Calibri" pitchFamily="34" charset="-120"/>
+                <a:latin typeface="Noto Sans CJK JP" pitchFamily="34" charset="0"/>
+                <a:ea typeface="Noto Sans CJK JP" pitchFamily="34" charset="-122"/>
+                <a:cs typeface="Noto Sans CJK JP" pitchFamily="34" charset="-120"/>
               </a:rPr>
               <a:t>運用資産（AUS）</a:t>
             </a:r>
@@ -13966,9 +13966,9 @@
                 <a:solidFill>
                   <a:srgbClr val="FFFFFF"/>
                 </a:solidFill>
-                <a:latin typeface="Georgia" pitchFamily="34" charset="0"/>
-                <a:ea typeface="Georgia" pitchFamily="34" charset="-122"/>
-                <a:cs typeface="Georgia" pitchFamily="34" charset="-120"/>
+                <a:latin typeface="Noto Sans CJK JP" pitchFamily="34" charset="0"/>
+                <a:ea typeface="Noto Sans CJK JP" pitchFamily="34" charset="-122"/>
+                <a:cs typeface="Noto Sans CJK JP" pitchFamily="34" charset="-120"/>
               </a:rPr>
               <a:t>$3.14兆</a:t>
             </a:r>
@@ -14005,9 +14005,9 @@
                 <a:solidFill>
                   <a:srgbClr val="AEBAD0"/>
                 </a:solidFill>
-                <a:latin typeface="Calibri" pitchFamily="34" charset="0"/>
-                <a:ea typeface="Calibri" pitchFamily="34" charset="-122"/>
-                <a:cs typeface="Calibri" pitchFamily="34" charset="-120"/>
+                <a:latin typeface="Noto Sans CJK JP" pitchFamily="34" charset="0"/>
+                <a:ea typeface="Noto Sans CJK JP" pitchFamily="34" charset="-122"/>
+                <a:cs typeface="Noto Sans CJK JP" pitchFamily="34" charset="-120"/>
               </a:rPr>
               <a:t>2024年末・過去最高</a:t>
             </a:r>
@@ -14044,9 +14044,9 @@
                 <a:solidFill>
                   <a:srgbClr val="0A1A3F"/>
                 </a:solidFill>
-                <a:latin typeface="Georgia" pitchFamily="34" charset="0"/>
-                <a:ea typeface="Georgia" pitchFamily="34" charset="-122"/>
-                <a:cs typeface="Georgia" pitchFamily="34" charset="-120"/>
+                <a:latin typeface="Noto Sans CJK JP" pitchFamily="34" charset="0"/>
+                <a:ea typeface="Noto Sans CJK JP" pitchFamily="34" charset="-122"/>
+                <a:cs typeface="Noto Sans CJK JP" pitchFamily="34" charset="-120"/>
               </a:rPr>
               <a:t>AUS推移（兆ドル）</a:t>
             </a:r>
@@ -14124,9 +14124,9 @@
                 <a:solidFill>
                   <a:srgbClr val="0A1A3F"/>
                 </a:solidFill>
-                <a:latin typeface="Calibri" pitchFamily="34" charset="0"/>
-                <a:ea typeface="Calibri" pitchFamily="34" charset="-122"/>
-                <a:cs typeface="Calibri" pitchFamily="34" charset="-120"/>
+                <a:latin typeface="Noto Sans CJK JP" pitchFamily="34" charset="0"/>
+                <a:ea typeface="Noto Sans CJK JP" pitchFamily="34" charset="-122"/>
+                <a:cs typeface="Noto Sans CJK JP" pitchFamily="34" charset="-120"/>
               </a:rPr>
               <a:t>28四半期連続で長期フィーベースの純流入</a:t>
             </a:r>
@@ -14163,9 +14163,9 @@
                 <a:solidFill>
                   <a:srgbClr val="5A6678"/>
                 </a:solidFill>
-                <a:latin typeface="Calibri" pitchFamily="34" charset="0"/>
-                <a:ea typeface="Calibri" pitchFamily="34" charset="-122"/>
-                <a:cs typeface="Calibri" pitchFamily="34" charset="-120"/>
+                <a:latin typeface="Noto Sans CJK JP" pitchFamily="34" charset="0"/>
+                <a:ea typeface="Noto Sans CJK JP" pitchFamily="34" charset="-122"/>
+                <a:cs typeface="Noto Sans CJK JP" pitchFamily="34" charset="-120"/>
               </a:rPr>
               <a:t>06</a:t>
             </a:r>
@@ -14234,9 +14234,9 @@
                 <a:solidFill>
                   <a:srgbClr val="C9A227"/>
                 </a:solidFill>
-                <a:latin typeface="Calibri" pitchFamily="34" charset="0"/>
-                <a:ea typeface="Calibri" pitchFamily="34" charset="-122"/>
-                <a:cs typeface="Calibri" pitchFamily="34" charset="-120"/>
+                <a:latin typeface="Noto Sans CJK JP" pitchFamily="34" charset="0"/>
+                <a:ea typeface="Noto Sans CJK JP" pitchFamily="34" charset="-122"/>
+                <a:cs typeface="Noto Sans CJK JP" pitchFamily="34" charset="-120"/>
               </a:rPr>
               <a:t>DIVISION 1 — STRATEGY</a:t>
             </a:r>
@@ -14273,9 +14273,9 @@
                 <a:solidFill>
                   <a:srgbClr val="0A1A3F"/>
                 </a:solidFill>
-                <a:latin typeface="Georgia" pitchFamily="34" charset="0"/>
-                <a:ea typeface="Georgia" pitchFamily="34" charset="-122"/>
-                <a:cs typeface="Georgia" pitchFamily="34" charset="-120"/>
+                <a:latin typeface="Noto Sans CJK JP" pitchFamily="34" charset="0"/>
+                <a:ea typeface="Noto Sans CJK JP" pitchFamily="34" charset="-122"/>
+                <a:cs typeface="Noto Sans CJK JP" pitchFamily="34" charset="-120"/>
               </a:rPr>
               <a:t>AWMの核心：自己投資 → 運用フィーへ</a:t>
             </a:r>
@@ -14364,9 +14364,9 @@
                 <a:solidFill>
                   <a:srgbClr val="5A6678"/>
                 </a:solidFill>
-                <a:latin typeface="Calibri" pitchFamily="34" charset="0"/>
-                <a:ea typeface="Calibri" pitchFamily="34" charset="-122"/>
-                <a:cs typeface="Calibri" pitchFamily="34" charset="-120"/>
+                <a:latin typeface="Noto Sans CJK JP" pitchFamily="34" charset="0"/>
+                <a:ea typeface="Noto Sans CJK JP" pitchFamily="34" charset="-122"/>
+                <a:cs typeface="Noto Sans CJK JP" pitchFamily="34" charset="-120"/>
               </a:rPr>
               <a:t>自己投資（プリンシパル投資）残高</a:t>
             </a:r>
@@ -14403,9 +14403,9 @@
                 <a:solidFill>
                   <a:srgbClr val="5A6678"/>
                 </a:solidFill>
-                <a:latin typeface="Georgia" pitchFamily="34" charset="0"/>
-                <a:ea typeface="Georgia" pitchFamily="34" charset="-122"/>
-                <a:cs typeface="Georgia" pitchFamily="34" charset="-120"/>
+                <a:latin typeface="Noto Sans CJK JP" pitchFamily="34" charset="0"/>
+                <a:ea typeface="Noto Sans CJK JP" pitchFamily="34" charset="-122"/>
+                <a:cs typeface="Noto Sans CJK JP" pitchFamily="34" charset="-120"/>
               </a:rPr>
               <a:t>$64B </a:t>
             </a:r>
@@ -14417,9 +14417,9 @@
                 <a:solidFill>
                   <a:srgbClr val="C9A227"/>
                 </a:solidFill>
-                <a:latin typeface="Georgia" pitchFamily="34" charset="0"/>
-                <a:ea typeface="Georgia" pitchFamily="34" charset="-122"/>
-                <a:cs typeface="Georgia" pitchFamily="34" charset="-120"/>
+                <a:latin typeface="Noto Sans CJK JP" pitchFamily="34" charset="0"/>
+                <a:ea typeface="Noto Sans CJK JP" pitchFamily="34" charset="-122"/>
+                <a:cs typeface="Noto Sans CJK JP" pitchFamily="34" charset="-120"/>
               </a:rPr>
               <a:t> → </a:t>
             </a:r>
@@ -14431,9 +14431,9 @@
                 <a:solidFill>
                   <a:srgbClr val="0A1A3F"/>
                 </a:solidFill>
-                <a:latin typeface="Georgia" pitchFamily="34" charset="0"/>
-                <a:ea typeface="Georgia" pitchFamily="34" charset="-122"/>
-                <a:cs typeface="Georgia" pitchFamily="34" charset="-120"/>
+                <a:latin typeface="Noto Sans CJK JP" pitchFamily="34" charset="0"/>
+                <a:ea typeface="Noto Sans CJK JP" pitchFamily="34" charset="-122"/>
+                <a:cs typeface="Noto Sans CJK JP" pitchFamily="34" charset="-120"/>
               </a:rPr>
               <a:t> $6B</a:t>
             </a:r>
@@ -14470,9 +14470,9 @@
                 <a:solidFill>
                   <a:srgbClr val="C9A227"/>
                 </a:solidFill>
-                <a:latin typeface="Calibri" pitchFamily="34" charset="0"/>
-                <a:ea typeface="Calibri" pitchFamily="34" charset="-122"/>
-                <a:cs typeface="Calibri" pitchFamily="34" charset="-120"/>
+                <a:latin typeface="Noto Sans CJK JP" pitchFamily="34" charset="0"/>
+                <a:ea typeface="Noto Sans CJK JP" pitchFamily="34" charset="-122"/>
+                <a:cs typeface="Noto Sans CJK JP" pitchFamily="34" charset="-120"/>
               </a:rPr>
               <a:t>9割超を圧縮 ＝ 収益のブレを縮小</a:t>
             </a:r>
@@ -14560,9 +14560,9 @@
                 <a:solidFill>
                   <a:srgbClr val="E8B84B"/>
                 </a:solidFill>
-                <a:latin typeface="Calibri" pitchFamily="34" charset="0"/>
-                <a:ea typeface="Calibri" pitchFamily="34" charset="-122"/>
-                <a:cs typeface="Calibri" pitchFamily="34" charset="-120"/>
+                <a:latin typeface="Noto Sans CJK JP" pitchFamily="34" charset="0"/>
+                <a:ea typeface="Noto Sans CJK JP" pitchFamily="34" charset="-122"/>
+                <a:cs typeface="Noto Sans CJK JP" pitchFamily="34" charset="-120"/>
               </a:rPr>
               <a:t>代わりに運用報酬を拡大</a:t>
             </a:r>
@@ -14599,9 +14599,9 @@
                 <a:solidFill>
                   <a:srgbClr val="AEBAD0"/>
                 </a:solidFill>
-                <a:latin typeface="Calibri" pitchFamily="34" charset="0"/>
-                <a:ea typeface="Calibri" pitchFamily="34" charset="-122"/>
-                <a:cs typeface="Calibri" pitchFamily="34" charset="-120"/>
+                <a:latin typeface="Noto Sans CJK JP" pitchFamily="34" charset="0"/>
+                <a:ea typeface="Noto Sans CJK JP" pitchFamily="34" charset="-122"/>
+                <a:cs typeface="Noto Sans CJK JP" pitchFamily="34" charset="-120"/>
               </a:rPr>
               <a:t>Management &amp; other fees（2024）</a:t>
             </a:r>
@@ -14638,9 +14638,9 @@
                 <a:solidFill>
                   <a:srgbClr val="FFFFFF"/>
                 </a:solidFill>
-                <a:latin typeface="Georgia" pitchFamily="34" charset="0"/>
-                <a:ea typeface="Georgia" pitchFamily="34" charset="-122"/>
-                <a:cs typeface="Georgia" pitchFamily="34" charset="-120"/>
+                <a:latin typeface="Noto Sans CJK JP" pitchFamily="34" charset="0"/>
+                <a:ea typeface="Noto Sans CJK JP" pitchFamily="34" charset="-122"/>
+                <a:cs typeface="Noto Sans CJK JP" pitchFamily="34" charset="-120"/>
               </a:rPr>
               <a:t>$10B超</a:t>
             </a:r>
@@ -14677,9 +14677,9 @@
                 <a:solidFill>
                   <a:srgbClr val="8E9CB8"/>
                 </a:solidFill>
-                <a:latin typeface="Calibri" pitchFamily="34" charset="0"/>
-                <a:ea typeface="Calibri" pitchFamily="34" charset="-122"/>
-                <a:cs typeface="Calibri" pitchFamily="34" charset="-120"/>
+                <a:latin typeface="Noto Sans CJK JP" pitchFamily="34" charset="0"/>
+                <a:ea typeface="Noto Sans CJK JP" pitchFamily="34" charset="-122"/>
+                <a:cs typeface="Noto Sans CJK JP" pitchFamily="34" charset="-120"/>
               </a:rPr>
               <a:t>安定的なフィー収益が収益の柱に</a:t>
             </a:r>
@@ -14716,9 +14716,9 @@
                 <a:solidFill>
                   <a:srgbClr val="0A1A3F"/>
                 </a:solidFill>
-                <a:latin typeface="Georgia" pitchFamily="34" charset="0"/>
-                <a:ea typeface="Georgia" pitchFamily="34" charset="-122"/>
-                <a:cs typeface="Georgia" pitchFamily="34" charset="-120"/>
+                <a:latin typeface="Noto Sans CJK JP" pitchFamily="34" charset="0"/>
+                <a:ea typeface="Noto Sans CJK JP" pitchFamily="34" charset="-122"/>
+                <a:cs typeface="Noto Sans CJK JP" pitchFamily="34" charset="-120"/>
               </a:rPr>
               <a:t>結果：税前マージンが激変</a:t>
             </a:r>
@@ -14823,9 +14823,9 @@
                 <a:solidFill>
                   <a:srgbClr val="0A1A3F"/>
                 </a:solidFill>
-                <a:latin typeface="Georgia" pitchFamily="34" charset="0"/>
-                <a:ea typeface="Georgia" pitchFamily="34" charset="-122"/>
-                <a:cs typeface="Georgia" pitchFamily="34" charset="-120"/>
+                <a:latin typeface="Noto Sans CJK JP" pitchFamily="34" charset="0"/>
+                <a:ea typeface="Noto Sans CJK JP" pitchFamily="34" charset="-122"/>
+                <a:cs typeface="Noto Sans CJK JP" pitchFamily="34" charset="-120"/>
               </a:rPr>
               <a:t>約$1.4B → 約$4.5B</a:t>
             </a:r>
@@ -14862,9 +14862,9 @@
                 <a:solidFill>
                   <a:srgbClr val="1B2436"/>
                 </a:solidFill>
-                <a:latin typeface="Calibri" pitchFamily="34" charset="0"/>
-                <a:ea typeface="Calibri" pitchFamily="34" charset="-122"/>
-                <a:cs typeface="Calibri" pitchFamily="34" charset="-120"/>
+                <a:latin typeface="Noto Sans CJK JP" pitchFamily="34" charset="0"/>
+                <a:ea typeface="Noto Sans CJK JP" pitchFamily="34" charset="-122"/>
+                <a:cs typeface="Noto Sans CJK JP" pitchFamily="34" charset="-120"/>
               </a:rPr>
               <a:t>税前利益（AWM）</a:t>
             </a:r>
@@ -14926,9 +14926,9 @@
                 <a:solidFill>
                   <a:srgbClr val="0A1A3F"/>
                 </a:solidFill>
-                <a:latin typeface="Georgia" pitchFamily="34" charset="0"/>
-                <a:ea typeface="Georgia" pitchFamily="34" charset="-122"/>
-                <a:cs typeface="Georgia" pitchFamily="34" charset="-120"/>
+                <a:latin typeface="Noto Sans CJK JP" pitchFamily="34" charset="0"/>
+                <a:ea typeface="Noto Sans CJK JP" pitchFamily="34" charset="-122"/>
+                <a:cs typeface="Noto Sans CJK JP" pitchFamily="34" charset="-120"/>
               </a:rPr>
               <a:t>「規模」より「収益の質」</a:t>
             </a:r>
@@ -14965,9 +14965,9 @@
                 <a:solidFill>
                   <a:srgbClr val="1B2436"/>
                 </a:solidFill>
-                <a:latin typeface="Calibri" pitchFamily="34" charset="0"/>
-                <a:ea typeface="Calibri" pitchFamily="34" charset="-122"/>
-                <a:cs typeface="Calibri" pitchFamily="34" charset="-120"/>
+                <a:latin typeface="Noto Sans CJK JP" pitchFamily="34" charset="0"/>
+                <a:ea typeface="Noto Sans CJK JP" pitchFamily="34" charset="-122"/>
+                <a:cs typeface="Noto Sans CJK JP" pitchFamily="34" charset="-120"/>
               </a:rPr>
               <a:t>中期目標 mid-20s% マージンを達成。</a:t>
             </a:r>
@@ -15004,9 +15004,9 @@
                 <a:solidFill>
                   <a:srgbClr val="5A6678"/>
                 </a:solidFill>
-                <a:latin typeface="Calibri" pitchFamily="34" charset="0"/>
-                <a:ea typeface="Calibri" pitchFamily="34" charset="-122"/>
-                <a:cs typeface="Calibri" pitchFamily="34" charset="-120"/>
+                <a:latin typeface="Noto Sans CJK JP" pitchFamily="34" charset="0"/>
+                <a:ea typeface="Noto Sans CJK JP" pitchFamily="34" charset="-122"/>
+                <a:cs typeface="Noto Sans CJK JP" pitchFamily="34" charset="-120"/>
               </a:rPr>
               <a:t>07</a:t>
             </a:r>
@@ -15075,9 +15075,9 @@
                 <a:solidFill>
                   <a:srgbClr val="C9A227"/>
                 </a:solidFill>
-                <a:latin typeface="Calibri" pitchFamily="34" charset="0"/>
-                <a:ea typeface="Calibri" pitchFamily="34" charset="-122"/>
-                <a:cs typeface="Calibri" pitchFamily="34" charset="-120"/>
+                <a:latin typeface="Noto Sans CJK JP" pitchFamily="34" charset="0"/>
+                <a:ea typeface="Noto Sans CJK JP" pitchFamily="34" charset="-122"/>
+                <a:cs typeface="Noto Sans CJK JP" pitchFamily="34" charset="-120"/>
               </a:rPr>
               <a:t>DIVISION 1 — EDGE</a:t>
             </a:r>
@@ -15114,9 +15114,9 @@
                 <a:solidFill>
                   <a:srgbClr val="0A1A3F"/>
                 </a:solidFill>
-                <a:latin typeface="Georgia" pitchFamily="34" charset="0"/>
-                <a:ea typeface="Georgia" pitchFamily="34" charset="-122"/>
-                <a:cs typeface="Georgia" pitchFamily="34" charset="-120"/>
+                <a:latin typeface="Noto Sans CJK JP" pitchFamily="34" charset="0"/>
+                <a:ea typeface="Noto Sans CJK JP" pitchFamily="34" charset="-122"/>
+                <a:cs typeface="Noto Sans CJK JP" pitchFamily="34" charset="-120"/>
               </a:rPr>
               <a:t>AWMの勝ち筋：規模ではなく高マージン領域へ</a:t>
             </a:r>
@@ -15249,9 +15249,9 @@
                 <a:solidFill>
                   <a:srgbClr val="0A1A3F"/>
                 </a:solidFill>
-                <a:latin typeface="Georgia" pitchFamily="34" charset="0"/>
-                <a:ea typeface="Georgia" pitchFamily="34" charset="-122"/>
-                <a:cs typeface="Georgia" pitchFamily="34" charset="-120"/>
+                <a:latin typeface="Noto Sans CJK JP" pitchFamily="34" charset="0"/>
+                <a:ea typeface="Noto Sans CJK JP" pitchFamily="34" charset="-122"/>
+                <a:cs typeface="Noto Sans CJK JP" pitchFamily="34" charset="-120"/>
               </a:rPr>
               <a:t>① オルタナティブ／プライベート市場</a:t>
             </a:r>
@@ -15292,9 +15292,9 @@
                 <a:solidFill>
                   <a:srgbClr val="1B2436"/>
                 </a:solidFill>
-                <a:latin typeface="Calibri" pitchFamily="34" charset="0"/>
-                <a:ea typeface="Calibri" pitchFamily="34" charset="-122"/>
-                <a:cs typeface="Calibri" pitchFamily="34" charset="-120"/>
+                <a:latin typeface="Noto Sans CJK JP" pitchFamily="34" charset="0"/>
+                <a:ea typeface="Noto Sans CJK JP" pitchFamily="34" charset="-122"/>
+                <a:cs typeface="Noto Sans CJK JP" pitchFamily="34" charset="-120"/>
               </a:rPr>
               <a:t>オルタナAUS $328B</a:t>
             </a:r>
@@ -15313,9 +15313,9 @@
                 <a:solidFill>
                   <a:srgbClr val="1B2436"/>
                 </a:solidFill>
-                <a:latin typeface="Calibri" pitchFamily="34" charset="0"/>
-                <a:ea typeface="Calibri" pitchFamily="34" charset="-122"/>
-                <a:cs typeface="Calibri" pitchFamily="34" charset="-120"/>
+                <a:latin typeface="Noto Sans CJK JP" pitchFamily="34" charset="0"/>
+                <a:ea typeface="Noto Sans CJK JP" pitchFamily="34" charset="-122"/>
+                <a:cs typeface="Noto Sans CJK JP" pitchFamily="34" charset="-120"/>
               </a:rPr>
               <a:t>資金調達目標 $225B を1年前倒し達成</a:t>
             </a:r>
@@ -15334,9 +15334,9 @@
                 <a:solidFill>
                   <a:srgbClr val="1B2436"/>
                 </a:solidFill>
-                <a:latin typeface="Calibri" pitchFamily="34" charset="0"/>
-                <a:ea typeface="Calibri" pitchFamily="34" charset="-122"/>
-                <a:cs typeface="Calibri" pitchFamily="34" charset="-120"/>
+                <a:latin typeface="Noto Sans CJK JP" pitchFamily="34" charset="0"/>
+                <a:ea typeface="Noto Sans CJK JP" pitchFamily="34" charset="-122"/>
+                <a:cs typeface="Noto Sans CJK JP" pitchFamily="34" charset="-120"/>
               </a:rPr>
               <a:t>「世界トップ5のオルタナ運用」</a:t>
             </a:r>
@@ -15449,9 +15449,9 @@
                 <a:solidFill>
                   <a:srgbClr val="0A1A3F"/>
                 </a:solidFill>
-                <a:latin typeface="Georgia" pitchFamily="34" charset="0"/>
-                <a:ea typeface="Georgia" pitchFamily="34" charset="-122"/>
-                <a:cs typeface="Georgia" pitchFamily="34" charset="-120"/>
+                <a:latin typeface="Noto Sans CJK JP" pitchFamily="34" charset="0"/>
+                <a:ea typeface="Noto Sans CJK JP" pitchFamily="34" charset="-122"/>
+                <a:cs typeface="Noto Sans CJK JP" pitchFamily="34" charset="-120"/>
               </a:rPr>
               <a:t>② UHNW（超富裕層）特化</a:t>
             </a:r>
@@ -15492,9 +15492,9 @@
                 <a:solidFill>
                   <a:srgbClr val="1B2436"/>
                 </a:solidFill>
-                <a:latin typeface="Calibri" pitchFamily="34" charset="0"/>
-                <a:ea typeface="Calibri" pitchFamily="34" charset="-122"/>
-                <a:cs typeface="Calibri" pitchFamily="34" charset="-120"/>
+                <a:latin typeface="Noto Sans CJK JP" pitchFamily="34" charset="0"/>
+                <a:ea typeface="Noto Sans CJK JP" pitchFamily="34" charset="-122"/>
+                <a:cs typeface="Noto Sans CJK JP" pitchFamily="34" charset="-120"/>
               </a:rPr>
               <a:t>低マージンのマスアフルエント（PFM）を売却</a:t>
             </a:r>
@@ -15513,9 +15513,9 @@
                 <a:solidFill>
                   <a:srgbClr val="1B2436"/>
                 </a:solidFill>
-                <a:latin typeface="Calibri" pitchFamily="34" charset="0"/>
-                <a:ea typeface="Calibri" pitchFamily="34" charset="-122"/>
-                <a:cs typeface="Calibri" pitchFamily="34" charset="-120"/>
+                <a:latin typeface="Noto Sans CJK JP" pitchFamily="34" charset="0"/>
+                <a:ea typeface="Noto Sans CJK JP" pitchFamily="34" charset="-122"/>
+                <a:cs typeface="Noto Sans CJK JP" pitchFamily="34" charset="-120"/>
               </a:rPr>
               <a:t>PWM ＋ Ayco に集中</a:t>
             </a:r>
@@ -15534,9 +15534,9 @@
                 <a:solidFill>
                   <a:srgbClr val="1B2436"/>
                 </a:solidFill>
-                <a:latin typeface="Calibri" pitchFamily="34" charset="0"/>
-                <a:ea typeface="Calibri" pitchFamily="34" charset="-122"/>
-                <a:cs typeface="Calibri" pitchFamily="34" charset="-120"/>
+                <a:latin typeface="Noto Sans CJK JP" pitchFamily="34" charset="0"/>
+                <a:ea typeface="Noto Sans CJK JP" pitchFamily="34" charset="-122"/>
+                <a:cs typeface="Noto Sans CJK JP" pitchFamily="34" charset="-120"/>
               </a:rPr>
               <a:t>「規模で挑まず、高マージンで勝つ」</a:t>
             </a:r>
@@ -15573,9 +15573,9 @@
                 <a:solidFill>
                   <a:srgbClr val="0A1A3F"/>
                 </a:solidFill>
-                <a:latin typeface="Georgia" pitchFamily="34" charset="0"/>
-                <a:ea typeface="Georgia" pitchFamily="34" charset="-122"/>
-                <a:cs typeface="Georgia" pitchFamily="34" charset="-120"/>
+                <a:latin typeface="Noto Sans CJK JP" pitchFamily="34" charset="0"/>
+                <a:ea typeface="Noto Sans CJK JP" pitchFamily="34" charset="-122"/>
+                <a:cs typeface="Noto Sans CJK JP" pitchFamily="34" charset="-120"/>
               </a:rPr>
               <a:t>運用規模の比較（兆ドル）</a:t>
             </a:r>
@@ -15655,9 +15655,9 @@
                 <a:solidFill>
                   <a:srgbClr val="FFFFFF"/>
                 </a:solidFill>
-                <a:latin typeface="Calibri" pitchFamily="34" charset="0"/>
-                <a:ea typeface="Calibri" pitchFamily="34" charset="-122"/>
-                <a:cs typeface="Calibri" pitchFamily="34" charset="-120"/>
+                <a:latin typeface="Noto Sans CJK JP" pitchFamily="34" charset="0"/>
+                <a:ea typeface="Noto Sans CJK JP" pitchFamily="34" charset="-122"/>
+                <a:cs typeface="Noto Sans CJK JP" pitchFamily="34" charset="-120"/>
               </a:rPr>
               <a:t>BlackRockは規模（パッシブ）の王者。</a:t>
             </a:r>
@@ -15672,9 +15672,9 @@
                 <a:solidFill>
                   <a:srgbClr val="E8B84B"/>
                 </a:solidFill>
-                <a:latin typeface="Calibri" pitchFamily="34" charset="0"/>
-                <a:ea typeface="Calibri" pitchFamily="34" charset="-122"/>
-                <a:cs typeface="Calibri" pitchFamily="34" charset="-120"/>
+                <a:latin typeface="Noto Sans CJK JP" pitchFamily="34" charset="0"/>
+                <a:ea typeface="Noto Sans CJK JP" pitchFamily="34" charset="-122"/>
+                <a:cs typeface="Noto Sans CJK JP" pitchFamily="34" charset="-120"/>
               </a:rPr>
               <a:t>GSは規模で挑まず、高マージンで勝つ。</a:t>
             </a:r>
@@ -15711,9 +15711,9 @@
                 <a:solidFill>
                   <a:srgbClr val="5A6678"/>
                 </a:solidFill>
-                <a:latin typeface="Calibri" pitchFamily="34" charset="0"/>
-                <a:ea typeface="Calibri" pitchFamily="34" charset="-122"/>
-                <a:cs typeface="Calibri" pitchFamily="34" charset="-120"/>
+                <a:latin typeface="Noto Sans CJK JP" pitchFamily="34" charset="0"/>
+                <a:ea typeface="Noto Sans CJK JP" pitchFamily="34" charset="-122"/>
+                <a:cs typeface="Noto Sans CJK JP" pitchFamily="34" charset="-120"/>
               </a:rPr>
               <a:t>08</a:t>
             </a:r>
@@ -15782,9 +15782,9 @@
                 <a:solidFill>
                   <a:srgbClr val="C9A227"/>
                 </a:solidFill>
-                <a:latin typeface="Calibri" pitchFamily="34" charset="0"/>
-                <a:ea typeface="Calibri" pitchFamily="34" charset="-122"/>
-                <a:cs typeface="Calibri" pitchFamily="34" charset="-120"/>
+                <a:latin typeface="Noto Sans CJK JP" pitchFamily="34" charset="0"/>
+                <a:ea typeface="Noto Sans CJK JP" pitchFamily="34" charset="-122"/>
+                <a:cs typeface="Noto Sans CJK JP" pitchFamily="34" charset="-120"/>
               </a:rPr>
               <a:t>DIVISION 2 — S&amp;T</a:t>
             </a:r>
@@ -15821,9 +15821,9 @@
                 <a:solidFill>
                   <a:srgbClr val="0A1A3F"/>
                 </a:solidFill>
-                <a:latin typeface="Georgia" pitchFamily="34" charset="0"/>
-                <a:ea typeface="Georgia" pitchFamily="34" charset="-122"/>
-                <a:cs typeface="Georgia" pitchFamily="34" charset="-120"/>
+                <a:latin typeface="Noto Sans CJK JP" pitchFamily="34" charset="0"/>
+                <a:ea typeface="Noto Sans CJK JP" pitchFamily="34" charset="-122"/>
+                <a:cs typeface="Noto Sans CJK JP" pitchFamily="34" charset="-120"/>
               </a:rPr>
               <a:t>【部門②】営業部門 ＝ Sales &amp; Trading（GBM）</a:t>
             </a:r>
@@ -15925,9 +15925,9 @@
                 <a:solidFill>
                   <a:srgbClr val="0A1A3F"/>
                 </a:solidFill>
-                <a:latin typeface="Calibri" pitchFamily="34" charset="0"/>
-                <a:ea typeface="Calibri" pitchFamily="34" charset="-122"/>
-                <a:cs typeface="Calibri" pitchFamily="34" charset="-120"/>
+                <a:latin typeface="Noto Sans CJK JP" pitchFamily="34" charset="0"/>
+                <a:ea typeface="Noto Sans CJK JP" pitchFamily="34" charset="-122"/>
+                <a:cs typeface="Noto Sans CJK JP" pitchFamily="34" charset="-120"/>
               </a:rPr>
               <a:t>位置づけ： </a:t>
             </a:r>
@@ -15939,9 +15939,9 @@
                 <a:solidFill>
                   <a:srgbClr val="1B2436"/>
                 </a:solidFill>
-                <a:latin typeface="Calibri" pitchFamily="34" charset="0"/>
-                <a:ea typeface="Calibri" pitchFamily="34" charset="-122"/>
-                <a:cs typeface="Calibri" pitchFamily="34" charset="-120"/>
+                <a:latin typeface="Noto Sans CJK JP" pitchFamily="34" charset="0"/>
+                <a:ea typeface="Noto Sans CJK JP" pitchFamily="34" charset="-122"/>
+                <a:cs typeface="Noto Sans CJK JP" pitchFamily="34" charset="-120"/>
               </a:rPr>
               <a:t>Global Banking &amp; Markets の中核。日本のGS証券では「証券部門」。</a:t>
             </a:r>
@@ -16010,9 +16010,9 @@
                 <a:solidFill>
                   <a:srgbClr val="0A1A3F"/>
                 </a:solidFill>
-                <a:latin typeface="Georgia" pitchFamily="34" charset="0"/>
-                <a:ea typeface="Georgia" pitchFamily="34" charset="-122"/>
-                <a:cs typeface="Georgia" pitchFamily="34" charset="-120"/>
+                <a:latin typeface="Noto Sans CJK JP" pitchFamily="34" charset="0"/>
+                <a:ea typeface="Noto Sans CJK JP" pitchFamily="34" charset="-122"/>
+                <a:cs typeface="Noto Sans CJK JP" pitchFamily="34" charset="-120"/>
               </a:rPr>
               <a:t>Equities（株式）グループ</a:t>
             </a:r>
@@ -16049,9 +16049,9 @@
                 <a:solidFill>
                   <a:srgbClr val="1B2436"/>
                 </a:solidFill>
-                <a:latin typeface="Calibri" pitchFamily="34" charset="0"/>
-                <a:ea typeface="Calibri" pitchFamily="34" charset="-122"/>
-                <a:cs typeface="Calibri" pitchFamily="34" charset="-120"/>
+                <a:latin typeface="Noto Sans CJK JP" pitchFamily="34" charset="0"/>
+                <a:ea typeface="Noto Sans CJK JP" pitchFamily="34" charset="-122"/>
+                <a:cs typeface="Noto Sans CJK JP" pitchFamily="34" charset="-120"/>
               </a:rPr>
               <a:t>株式・派生のマーケットメイクと顧客フロー</a:t>
             </a:r>
@@ -16120,9 +16120,9 @@
                 <a:solidFill>
                   <a:srgbClr val="0A1A3F"/>
                 </a:solidFill>
-                <a:latin typeface="Georgia" pitchFamily="34" charset="0"/>
-                <a:ea typeface="Georgia" pitchFamily="34" charset="-122"/>
-                <a:cs typeface="Georgia" pitchFamily="34" charset="-120"/>
+                <a:latin typeface="Noto Sans CJK JP" pitchFamily="34" charset="0"/>
+                <a:ea typeface="Noto Sans CJK JP" pitchFamily="34" charset="-122"/>
+                <a:cs typeface="Noto Sans CJK JP" pitchFamily="34" charset="-120"/>
               </a:rPr>
               <a:t>FICC（債券・為替・コモディティ）グループ</a:t>
             </a:r>
@@ -16159,9 +16159,9 @@
                 <a:solidFill>
                   <a:srgbClr val="1B2436"/>
                 </a:solidFill>
-                <a:latin typeface="Calibri" pitchFamily="34" charset="0"/>
-                <a:ea typeface="Calibri" pitchFamily="34" charset="-122"/>
-                <a:cs typeface="Calibri" pitchFamily="34" charset="-120"/>
+                <a:latin typeface="Noto Sans CJK JP" pitchFamily="34" charset="0"/>
+                <a:ea typeface="Noto Sans CJK JP" pitchFamily="34" charset="-122"/>
+                <a:cs typeface="Noto Sans CJK JP" pitchFamily="34" charset="-120"/>
               </a:rPr>
               <a:t>金利・クレジット・通貨・商品のトレーディング</a:t>
             </a:r>
@@ -16198,9 +16198,9 @@
                 <a:solidFill>
                   <a:srgbClr val="0A1A3F"/>
                 </a:solidFill>
-                <a:latin typeface="Georgia" pitchFamily="34" charset="0"/>
-                <a:ea typeface="Georgia" pitchFamily="34" charset="-122"/>
-                <a:cs typeface="Georgia" pitchFamily="34" charset="-120"/>
+                <a:latin typeface="Noto Sans CJK JP" pitchFamily="34" charset="0"/>
+                <a:ea typeface="Noto Sans CJK JP" pitchFamily="34" charset="-122"/>
+                <a:cs typeface="Noto Sans CJK JP" pitchFamily="34" charset="-120"/>
               </a:rPr>
               <a:t>職種</a:t>
             </a:r>
@@ -16259,9 +16259,9 @@
                 <a:solidFill>
                   <a:srgbClr val="FFFFFF"/>
                 </a:solidFill>
-                <a:latin typeface="Calibri" pitchFamily="34" charset="0"/>
-                <a:ea typeface="Calibri" pitchFamily="34" charset="-122"/>
-                <a:cs typeface="Calibri" pitchFamily="34" charset="-120"/>
+                <a:latin typeface="Noto Sans CJK JP" pitchFamily="34" charset="0"/>
+                <a:ea typeface="Noto Sans CJK JP" pitchFamily="34" charset="-122"/>
+                <a:cs typeface="Noto Sans CJK JP" pitchFamily="34" charset="-120"/>
               </a:rPr>
               <a:t>Sales（機関投資家カバレッジ）</a:t>
             </a:r>
@@ -16320,9 +16320,9 @@
                 <a:solidFill>
                   <a:srgbClr val="FFFFFF"/>
                 </a:solidFill>
-                <a:latin typeface="Calibri" pitchFamily="34" charset="0"/>
-                <a:ea typeface="Calibri" pitchFamily="34" charset="-122"/>
-                <a:cs typeface="Calibri" pitchFamily="34" charset="-120"/>
+                <a:latin typeface="Noto Sans CJK JP" pitchFamily="34" charset="0"/>
+                <a:ea typeface="Noto Sans CJK JP" pitchFamily="34" charset="-122"/>
+                <a:cs typeface="Noto Sans CJK JP" pitchFamily="34" charset="-120"/>
               </a:rPr>
               <a:t>Trading（マーケットメイク）</a:t>
             </a:r>
@@ -16381,9 +16381,9 @@
                 <a:solidFill>
                   <a:srgbClr val="FFFFFF"/>
                 </a:solidFill>
-                <a:latin typeface="Calibri" pitchFamily="34" charset="0"/>
-                <a:ea typeface="Calibri" pitchFamily="34" charset="-122"/>
-                <a:cs typeface="Calibri" pitchFamily="34" charset="-120"/>
+                <a:latin typeface="Noto Sans CJK JP" pitchFamily="34" charset="0"/>
+                <a:ea typeface="Noto Sans CJK JP" pitchFamily="34" charset="-122"/>
+                <a:cs typeface="Noto Sans CJK JP" pitchFamily="34" charset="-120"/>
               </a:rPr>
               <a:t>Strats（クオンツ）</a:t>
             </a:r>
@@ -16472,9 +16472,9 @@
                 <a:solidFill>
                   <a:srgbClr val="0A1A3F"/>
                 </a:solidFill>
-                <a:latin typeface="Georgia" pitchFamily="34" charset="0"/>
-                <a:ea typeface="Georgia" pitchFamily="34" charset="-122"/>
-                <a:cs typeface="Georgia" pitchFamily="34" charset="-120"/>
+                <a:latin typeface="Noto Sans CJK JP" pitchFamily="34" charset="0"/>
+                <a:ea typeface="Noto Sans CJK JP" pitchFamily="34" charset="-122"/>
+                <a:cs typeface="Noto Sans CJK JP" pitchFamily="34" charset="-120"/>
               </a:rPr>
               <a:t>$13.2B（+9%）</a:t>
             </a:r>
@@ -16511,9 +16511,9 @@
                 <a:solidFill>
                   <a:srgbClr val="1B2436"/>
                 </a:solidFill>
-                <a:latin typeface="Calibri" pitchFamily="34" charset="0"/>
-                <a:ea typeface="Calibri" pitchFamily="34" charset="-122"/>
-                <a:cs typeface="Calibri" pitchFamily="34" charset="-120"/>
+                <a:latin typeface="Noto Sans CJK JP" pitchFamily="34" charset="0"/>
+                <a:ea typeface="Noto Sans CJK JP" pitchFamily="34" charset="-122"/>
+                <a:cs typeface="Noto Sans CJK JP" pitchFamily="34" charset="-120"/>
               </a:rPr>
               <a:t>FICC（FY2024）</a:t>
             </a:r>
@@ -16602,9 +16602,9 @@
                 <a:solidFill>
                   <a:srgbClr val="0A1A3F"/>
                 </a:solidFill>
-                <a:latin typeface="Georgia" pitchFamily="34" charset="0"/>
-                <a:ea typeface="Georgia" pitchFamily="34" charset="-122"/>
-                <a:cs typeface="Georgia" pitchFamily="34" charset="-120"/>
+                <a:latin typeface="Noto Sans CJK JP" pitchFamily="34" charset="0"/>
+                <a:ea typeface="Noto Sans CJK JP" pitchFamily="34" charset="-122"/>
+                <a:cs typeface="Noto Sans CJK JP" pitchFamily="34" charset="-120"/>
               </a:rPr>
               <a:t>$13.43B（+16%）</a:t>
             </a:r>
@@ -16641,9 +16641,9 @@
                 <a:solidFill>
                   <a:srgbClr val="1B2436"/>
                 </a:solidFill>
-                <a:latin typeface="Calibri" pitchFamily="34" charset="0"/>
-                <a:ea typeface="Calibri" pitchFamily="34" charset="-122"/>
-                <a:cs typeface="Calibri" pitchFamily="34" charset="-120"/>
+                <a:latin typeface="Noto Sans CJK JP" pitchFamily="34" charset="0"/>
+                <a:ea typeface="Noto Sans CJK JP" pitchFamily="34" charset="-122"/>
+                <a:cs typeface="Noto Sans CJK JP" pitchFamily="34" charset="-120"/>
               </a:rPr>
               <a:t>Equities（FY2024・過去最高）</a:t>
             </a:r>
@@ -16680,9 +16680,9 @@
                 <a:solidFill>
                   <a:srgbClr val="5A6678"/>
                 </a:solidFill>
-                <a:latin typeface="Calibri" pitchFamily="34" charset="0"/>
-                <a:ea typeface="Calibri" pitchFamily="34" charset="-122"/>
-                <a:cs typeface="Calibri" pitchFamily="34" charset="-120"/>
+                <a:latin typeface="Noto Sans CJK JP" pitchFamily="34" charset="0"/>
+                <a:ea typeface="Noto Sans CJK JP" pitchFamily="34" charset="-122"/>
+                <a:cs typeface="Noto Sans CJK JP" pitchFamily="34" charset="-120"/>
               </a:rPr>
               <a:t>09</a:t>
             </a:r>
